--- a/NICE-智能座舱-售前方案-master-V2.pptx
+++ b/NICE-智能座舱-售前方案-master-V2.pptx
@@ -21680,107 +21680,9 @@
           </a:p>
         </p:txBody>
       </p:sp>
-      <p:sp>
-        <p:nvSpPr>
-          <p:cNvPr id="41" name="Rounded Rectangle 40"/>
-          <p:cNvSpPr/>
-          <p:nvPr/>
-        </p:nvSpPr>
-        <p:spPr>
-          <a:xfrm>
-            <a:off x="5257800" y="1097280"/>
-            <a:ext cx="3383280" cy="2743200"/>
-          </a:xfrm>
-          <a:prstGeom prst="roundRect">
-            <a:avLst>
-              <a:gd name="adj" fmla="val 5000"/>
-            </a:avLst>
-          </a:prstGeom>
-          <a:solidFill>
-            <a:srgbClr val="F5F8FD"/>
-          </a:solidFill>
-          <a:ln w="9525">
-            <a:solidFill>
-              <a:srgbClr val="E2E8F3"/>
-            </a:solidFill>
-          </a:ln>
-          <a:effectLst>
-            <a:outerShdw blurRad="50000" dist="16000" dir="5400000" rotWithShape="0">
-              <a:srgbClr val="17244A">
-                <a:alpha val="82000"/>
-              </a:srgbClr>
-            </a:outerShdw>
-          </a:effectLst>
-        </p:spPr>
-        <p:style>
-          <a:lnRef idx="1">
-            <a:schemeClr val="accent1"/>
-          </a:lnRef>
-          <a:fillRef idx="3">
-            <a:schemeClr val="accent1"/>
-          </a:fillRef>
-          <a:effectRef idx="2">
-            <a:schemeClr val="accent1"/>
-          </a:effectRef>
-          <a:fontRef idx="minor">
-            <a:schemeClr val="lt1"/>
-          </a:fontRef>
-        </p:style>
-        <p:txBody>
-          <a:bodyPr rtlCol="0" anchor="ctr"/>
-          <a:lstStyle/>
-          <a:p>
-            <a:pPr algn="ctr"/>
-          </a:p>
-        </p:txBody>
-      </p:sp>
-      <p:sp>
-        <p:nvSpPr>
-          <p:cNvPr id="42" name="Oval 41"/>
-          <p:cNvSpPr/>
-          <p:nvPr/>
-        </p:nvSpPr>
-        <p:spPr>
-          <a:xfrm>
-            <a:off x="6629400" y="1828800"/>
-            <a:ext cx="640080" cy="640080"/>
-          </a:xfrm>
-          <a:prstGeom prst="ellipse">
-            <a:avLst/>
-          </a:prstGeom>
-          <a:solidFill>
-            <a:srgbClr val="C8D2E2"/>
-          </a:solidFill>
-          <a:ln>
-            <a:noFill/>
-          </a:ln>
-          <a:effectLst/>
-        </p:spPr>
-        <p:style>
-          <a:lnRef idx="1">
-            <a:schemeClr val="accent1"/>
-          </a:lnRef>
-          <a:fillRef idx="3">
-            <a:schemeClr val="accent1"/>
-          </a:fillRef>
-          <a:effectRef idx="2">
-            <a:schemeClr val="accent1"/>
-          </a:effectRef>
-          <a:fontRef idx="minor">
-            <a:schemeClr val="lt1"/>
-          </a:fontRef>
-        </p:style>
-        <p:txBody>
-          <a:bodyPr rtlCol="0" anchor="ctr"/>
-          <a:lstStyle/>
-          <a:p>
-            <a:pPr algn="ctr"/>
-          </a:p>
-        </p:txBody>
-      </p:sp>
       <p:pic>
         <p:nvPicPr>
-          <p:cNvPr id="43" name="Picture 42" descr="w-19-3.png"/>
+          <p:cNvPr id="41" name="Picture 40" descr="ix.jpg"/>
           <p:cNvPicPr>
             <a:picLocks noChangeAspect="1"/>
           </p:cNvPicPr>
@@ -21794,24 +21696,31 @@
         </p:blipFill>
         <p:spPr>
           <a:xfrm>
-            <a:off x="6783019" y="1982419"/>
-            <a:ext cx="332841" cy="332841"/>
-          </a:xfrm>
-          <a:prstGeom prst="rect">
-            <a:avLst/>
-          </a:prstGeom>
+            <a:off x="5257800" y="1097280"/>
+            <a:ext cx="3383280" cy="1874519"/>
+          </a:xfrm>
+          <a:prstGeom prst="rect">
+            <a:avLst/>
+          </a:prstGeom>
+          <a:effectLst>
+            <a:outerShdw blurRad="55000" dist="18000" dir="5400000" rotWithShape="0">
+              <a:srgbClr val="17244A">
+                <a:alpha val="78000"/>
+              </a:srgbClr>
+            </a:outerShdw>
+          </a:effectLst>
         </p:spPr>
       </p:pic>
       <p:sp>
         <p:nvSpPr>
-          <p:cNvPr id="44" name="TextBox 43"/>
+          <p:cNvPr id="42" name="TextBox 41"/>
           <p:cNvSpPr txBox="1"/>
           <p:nvPr/>
         </p:nvSpPr>
         <p:spPr>
           <a:xfrm>
-            <a:off x="5257800" y="2606040"/>
-            <a:ext cx="3383280" cy="365760"/>
+            <a:off x="5257800" y="3035808"/>
+            <a:ext cx="3383280" cy="292608"/>
           </a:xfrm>
           <a:prstGeom prst="rect">
             <a:avLst/>
@@ -21836,29 +21745,29 @@
               </a:spcAft>
             </a:pPr>
             <a:r>
-              <a:rPr sz="1100" b="1" i="0">
+              <a:rPr sz="900" b="1" i="0">
                 <a:solidFill>
-                  <a:srgbClr val="959FB5"/>
+                  <a:srgbClr val="246BFF"/>
                 </a:solidFill>
                 <a:latin typeface="微软雅黑"/>
                 <a:ea typeface="微软雅黑"/>
                 <a:cs typeface="微软雅黑"/>
               </a:rPr>
-              <a:t>〔 体验舱效果图占位 〕</a:t>
+              <a:t>卓迈 iX-2024 红点奖座舱</a:t>
             </a:r>
           </a:p>
         </p:txBody>
       </p:sp>
       <p:sp>
         <p:nvSpPr>
-          <p:cNvPr id="45" name="TextBox 44"/>
+          <p:cNvPr id="43" name="TextBox 42"/>
           <p:cNvSpPr txBox="1"/>
           <p:nvPr/>
         </p:nvSpPr>
         <p:spPr>
           <a:xfrm>
-            <a:off x="5257800" y="2971800"/>
-            <a:ext cx="3383280" cy="274320"/>
+            <a:off x="5257800" y="3346704"/>
+            <a:ext cx="3383280" cy="457200"/>
           </a:xfrm>
           <a:prstGeom prst="rect">
             <a:avLst/>
@@ -21873,7 +21782,7 @@
           <a:p>
             <a:pPr algn="ctr">
               <a:lnSpc>
-                <a:spcPct val="100000"/>
+                <a:spcPct val="110000"/>
               </a:lnSpc>
               <a:spcBef>
                 <a:spcPts val="0"/>
@@ -21883,7 +21792,7 @@
               </a:spcAft>
             </a:pPr>
             <a:r>
-              <a:rPr sz="850" b="0" i="0">
+              <a:rPr sz="800" b="0" i="0">
                 <a:solidFill>
                   <a:srgbClr val="959FB5"/>
                 </a:solidFill>
@@ -21891,14 +21800,14 @@
                 <a:ea typeface="微软雅黑"/>
                 <a:cs typeface="微软雅黑"/>
               </a:rPr>
-              <a:t>替换为造型渲染图</a:t>
+              <a:t>同类获奖座舱示意 · 待替换为 NICE 专属渲染</a:t>
             </a:r>
           </a:p>
         </p:txBody>
       </p:sp>
       <p:sp>
         <p:nvSpPr>
-          <p:cNvPr id="46" name="Rounded Rectangle 45"/>
+          <p:cNvPr id="44" name="Rounded Rectangle 43"/>
           <p:cNvSpPr/>
           <p:nvPr/>
         </p:nvSpPr>
@@ -21958,7 +21867,7 @@
       </p:sp>
       <p:sp>
         <p:nvSpPr>
-          <p:cNvPr id="47" name="Rectangle 46"/>
+          <p:cNvPr id="45" name="Rectangle 44"/>
           <p:cNvSpPr/>
           <p:nvPr/>
         </p:nvSpPr>
@@ -22002,7 +21911,7 @@
       </p:sp>
       <p:sp>
         <p:nvSpPr>
-          <p:cNvPr id="48" name="TextBox 47"/>
+          <p:cNvPr id="46" name="TextBox 45"/>
           <p:cNvSpPr txBox="1"/>
           <p:nvPr/>
         </p:nvSpPr>
@@ -22060,7 +21969,7 @@
       </p:sp>
       <p:sp>
         <p:nvSpPr>
-          <p:cNvPr id="49" name="Rectangle 48"/>
+          <p:cNvPr id="47" name="Rectangle 46"/>
           <p:cNvSpPr/>
           <p:nvPr/>
         </p:nvSpPr>
@@ -22104,7 +22013,7 @@
       </p:sp>
       <p:sp>
         <p:nvSpPr>
-          <p:cNvPr id="50" name="TextBox 49"/>
+          <p:cNvPr id="48" name="TextBox 47"/>
           <p:cNvSpPr txBox="1"/>
           <p:nvPr/>
         </p:nvSpPr>
@@ -22162,7 +22071,7 @@
       </p:sp>
       <p:sp>
         <p:nvSpPr>
-          <p:cNvPr id="51" name="TextBox 50"/>
+          <p:cNvPr id="49" name="TextBox 48"/>
           <p:cNvSpPr txBox="1"/>
           <p:nvPr/>
         </p:nvSpPr>
@@ -43367,16 +43276,47 @@
           </a:p>
         </p:txBody>
       </p:sp>
-      <p:sp>
-        <p:nvSpPr>
-          <p:cNvPr id="30" name="TextBox 29"/>
+      <p:pic>
+        <p:nvPicPr>
+          <p:cNvPr id="30" name="Picture 29" descr="joy.jpg"/>
+          <p:cNvPicPr>
+            <a:picLocks noChangeAspect="1"/>
+          </p:cNvPicPr>
+          <p:nvPr/>
+        </p:nvPicPr>
+        <p:blipFill>
+          <a:blip r:embed="rId2"/>
+          <a:stretch>
+            <a:fillRect/>
+          </a:stretch>
+        </p:blipFill>
+        <p:spPr>
+          <a:xfrm>
+            <a:off x="640080" y="1207008"/>
+            <a:ext cx="3749039" cy="1325880"/>
+          </a:xfrm>
+          <a:prstGeom prst="rect">
+            <a:avLst/>
+          </a:prstGeom>
+          <a:effectLst>
+            <a:outerShdw blurRad="80000" dist="30000" dir="5400000" rotWithShape="0">
+              <a:srgbClr val="17244A">
+                <a:alpha val="80000"/>
+              </a:srgbClr>
+            </a:outerShdw>
+          </a:effectLst>
+        </p:spPr>
+      </p:pic>
+      <p:sp>
+        <p:nvSpPr>
+          <p:cNvPr id="31" name="TextBox 30"/>
           <p:cNvSpPr txBox="1"/>
           <p:nvPr/>
         </p:nvSpPr>
         <p:spPr>
           <a:xfrm>
-            <a:off x="731520" y="1261872"/>
-            <a:ext cx="3657600" cy="365760"/>
+            <a:off x="731520" y="2615184"/>
+            <a:ext cx="3657600" cy="292608"/>
           </a:xfrm>
           <a:prstGeom prst="rect">
             <a:avLst/>
@@ -43401,7 +43341,7 @@
               </a:spcAft>
             </a:pPr>
             <a:r>
-              <a:rPr sz="1250" b="1" i="0">
+              <a:rPr sz="1200" b="1" i="0">
                 <a:solidFill>
                   <a:srgbClr val="0A1A3D"/>
                 </a:solidFill>
@@ -43416,14 +43356,58 @@
       </p:sp>
       <p:sp>
         <p:nvSpPr>
-          <p:cNvPr id="31" name="TextBox 30"/>
+          <p:cNvPr id="32" name="Rectangle 31"/>
+          <p:cNvSpPr/>
+          <p:nvPr/>
+        </p:nvSpPr>
+        <p:spPr>
+          <a:xfrm>
+            <a:off x="731520" y="3017520"/>
+            <a:ext cx="91440" cy="91440"/>
+          </a:xfrm>
+          <a:prstGeom prst="rect">
+            <a:avLst/>
+          </a:prstGeom>
+          <a:solidFill>
+            <a:srgbClr val="00B5E3"/>
+          </a:solidFill>
+          <a:ln>
+            <a:noFill/>
+          </a:ln>
+          <a:effectLst/>
+        </p:spPr>
+        <p:style>
+          <a:lnRef idx="1">
+            <a:schemeClr val="accent1"/>
+          </a:lnRef>
+          <a:fillRef idx="3">
+            <a:schemeClr val="accent1"/>
+          </a:fillRef>
+          <a:effectRef idx="2">
+            <a:schemeClr val="accent1"/>
+          </a:effectRef>
+          <a:fontRef idx="minor">
+            <a:schemeClr val="lt1"/>
+          </a:fontRef>
+        </p:style>
+        <p:txBody>
+          <a:bodyPr rtlCol="0" anchor="ctr"/>
+          <a:lstStyle/>
+          <a:p>
+            <a:pPr algn="ctr"/>
+          </a:p>
+        </p:txBody>
+      </p:sp>
+      <p:sp>
+        <p:nvSpPr>
+          <p:cNvPr id="33" name="TextBox 32"/>
           <p:cNvSpPr txBox="1"/>
           <p:nvPr/>
         </p:nvSpPr>
         <p:spPr>
           <a:xfrm>
-            <a:off x="731520" y="1645920"/>
-            <a:ext cx="3657600" cy="292608"/>
+            <a:off x="914400" y="2980944"/>
+            <a:ext cx="3520440" cy="292608"/>
           </a:xfrm>
           <a:prstGeom prst="rect">
             <a:avLst/>
@@ -43448,29 +43432,29 @@
               </a:spcAft>
             </a:pPr>
             <a:r>
-              <a:rPr sz="850" b="1" i="0">
+              <a:rPr sz="800" b="0" i="0">
                 <a:solidFill>
-                  <a:srgbClr val="246BFF"/>
+                  <a:srgbClr val="5B6782"/>
                 </a:solidFill>
                 <a:latin typeface="微软雅黑"/>
                 <a:ea typeface="微软雅黑"/>
                 <a:cs typeface="微软雅黑"/>
               </a:rPr>
-              <a:t>沉浸式智能座舱 · 头部 Tier1 共创范式</a:t>
+              <a:t>沉浸式智能座舱·头部Tier1共创范式</a:t>
             </a:r>
           </a:p>
         </p:txBody>
       </p:sp>
       <p:sp>
         <p:nvSpPr>
-          <p:cNvPr id="32" name="Rectangle 31"/>
-          <p:cNvSpPr/>
-          <p:nvPr/>
-        </p:nvSpPr>
-        <p:spPr>
-          <a:xfrm>
-            <a:off x="731520" y="2075688"/>
-            <a:ext cx="100584" cy="100584"/>
+          <p:cNvPr id="34" name="Rectangle 33"/>
+          <p:cNvSpPr/>
+          <p:nvPr/>
+        </p:nvSpPr>
+        <p:spPr>
+          <a:xfrm>
+            <a:off x="731520" y="3310127"/>
+            <a:ext cx="91440" cy="91440"/>
           </a:xfrm>
           <a:prstGeom prst="rect">
             <a:avLst/>
@@ -43507,14 +43491,14 @@
       </p:sp>
       <p:sp>
         <p:nvSpPr>
-          <p:cNvPr id="33" name="TextBox 32"/>
+          <p:cNvPr id="35" name="TextBox 34"/>
           <p:cNvSpPr txBox="1"/>
           <p:nvPr/>
         </p:nvSpPr>
         <p:spPr>
           <a:xfrm>
-            <a:off x="914400" y="2029968"/>
-            <a:ext cx="3520440" cy="365760"/>
+            <a:off x="914400" y="3273551"/>
+            <a:ext cx="3520440" cy="292608"/>
           </a:xfrm>
           <a:prstGeom prst="rect">
             <a:avLst/>
@@ -43539,7 +43523,7 @@
               </a:spcAft>
             </a:pPr>
             <a:r>
-              <a:rPr sz="850" b="0" i="0">
+              <a:rPr sz="800" b="0" i="0">
                 <a:solidFill>
                   <a:srgbClr val="5B6782"/>
                 </a:solidFill>
@@ -43547,21 +43531,21 @@
                 <a:ea typeface="微软雅黑"/>
                 <a:cs typeface="微软雅黑"/>
               </a:rPr>
-              <a:t>赛博机能美学·连续性光导</a:t>
+              <a:t>赛博机能美学·天空之镜水晶极光·AI智慧体</a:t>
             </a:r>
           </a:p>
         </p:txBody>
       </p:sp>
       <p:sp>
         <p:nvSpPr>
-          <p:cNvPr id="34" name="Rectangle 33"/>
-          <p:cNvSpPr/>
-          <p:nvPr/>
-        </p:nvSpPr>
-        <p:spPr>
-          <a:xfrm>
-            <a:off x="731520" y="2487168"/>
-            <a:ext cx="100584" cy="100584"/>
+          <p:cNvPr id="36" name="Rectangle 35"/>
+          <p:cNvSpPr/>
+          <p:nvPr/>
+        </p:nvSpPr>
+        <p:spPr>
+          <a:xfrm>
+            <a:off x="731520" y="3602736"/>
+            <a:ext cx="91440" cy="91440"/>
           </a:xfrm>
           <a:prstGeom prst="rect">
             <a:avLst/>
@@ -43598,14 +43582,14 @@
       </p:sp>
       <p:sp>
         <p:nvSpPr>
-          <p:cNvPr id="35" name="TextBox 34"/>
+          <p:cNvPr id="37" name="TextBox 36"/>
           <p:cNvSpPr txBox="1"/>
           <p:nvPr/>
         </p:nvSpPr>
         <p:spPr>
           <a:xfrm>
-            <a:off x="914400" y="2441448"/>
-            <a:ext cx="3520440" cy="365760"/>
+            <a:off x="914400" y="3566160"/>
+            <a:ext cx="3520440" cy="292608"/>
           </a:xfrm>
           <a:prstGeom prst="rect">
             <a:avLst/>
@@ -43630,189 +43614,7 @@
               </a:spcAft>
             </a:pPr>
             <a:r>
-              <a:rPr sz="850" b="0" i="0">
-                <a:solidFill>
-                  <a:srgbClr val="5B6782"/>
-                </a:solidFill>
-                <a:latin typeface="微软雅黑"/>
-                <a:ea typeface="微软雅黑"/>
-                <a:cs typeface="微软雅黑"/>
-              </a:rPr>
-              <a:t>再生涤纶环保选材</a:t>
-            </a:r>
-          </a:p>
-        </p:txBody>
-      </p:sp>
-      <p:sp>
-        <p:nvSpPr>
-          <p:cNvPr id="36" name="Rectangle 35"/>
-          <p:cNvSpPr/>
-          <p:nvPr/>
-        </p:nvSpPr>
-        <p:spPr>
-          <a:xfrm>
-            <a:off x="731520" y="2898648"/>
-            <a:ext cx="100584" cy="100584"/>
-          </a:xfrm>
-          <a:prstGeom prst="rect">
-            <a:avLst/>
-          </a:prstGeom>
-          <a:solidFill>
-            <a:srgbClr val="00B5E3"/>
-          </a:solidFill>
-          <a:ln>
-            <a:noFill/>
-          </a:ln>
-          <a:effectLst/>
-        </p:spPr>
-        <p:style>
-          <a:lnRef idx="1">
-            <a:schemeClr val="accent1"/>
-          </a:lnRef>
-          <a:fillRef idx="3">
-            <a:schemeClr val="accent1"/>
-          </a:fillRef>
-          <a:effectRef idx="2">
-            <a:schemeClr val="accent1"/>
-          </a:effectRef>
-          <a:fontRef idx="minor">
-            <a:schemeClr val="lt1"/>
-          </a:fontRef>
-        </p:style>
-        <p:txBody>
-          <a:bodyPr rtlCol="0" anchor="ctr"/>
-          <a:lstStyle/>
-          <a:p>
-            <a:pPr algn="ctr"/>
-          </a:p>
-        </p:txBody>
-      </p:sp>
-      <p:sp>
-        <p:nvSpPr>
-          <p:cNvPr id="37" name="TextBox 36"/>
-          <p:cNvSpPr txBox="1"/>
-          <p:nvPr/>
-        </p:nvSpPr>
-        <p:spPr>
-          <a:xfrm>
-            <a:off x="914400" y="2852928"/>
-            <a:ext cx="3520440" cy="365760"/>
-          </a:xfrm>
-          <a:prstGeom prst="rect">
-            <a:avLst/>
-          </a:prstGeom>
-          <a:noFill/>
-        </p:spPr>
-        <p:txBody>
-          <a:bodyPr wrap="square" anchor="t" lIns="27432" rIns="27432" tIns="9144" bIns="9144">
-            <a:spAutoFit/>
-          </a:bodyPr>
-          <a:lstStyle/>
-          <a:p>
-            <a:pPr algn="l">
-              <a:lnSpc>
-                <a:spcPct val="100000"/>
-              </a:lnSpc>
-              <a:spcBef>
-                <a:spcPts val="0"/>
-              </a:spcBef>
-              <a:spcAft>
-                <a:spcPts val="200"/>
-              </a:spcAft>
-            </a:pPr>
-            <a:r>
-              <a:rPr sz="850" b="0" i="0">
-                <a:solidFill>
-                  <a:srgbClr val="5B6782"/>
-                </a:solidFill>
-                <a:latin typeface="微软雅黑"/>
-                <a:ea typeface="微软雅黑"/>
-                <a:cs typeface="微软雅黑"/>
-              </a:rPr>
-              <a:t>天空之镜水晶极光·飞控旋钮·AI智慧体</a:t>
-            </a:r>
-          </a:p>
-        </p:txBody>
-      </p:sp>
-      <p:sp>
-        <p:nvSpPr>
-          <p:cNvPr id="38" name="Rectangle 37"/>
-          <p:cNvSpPr/>
-          <p:nvPr/>
-        </p:nvSpPr>
-        <p:spPr>
-          <a:xfrm>
-            <a:off x="731520" y="3310128"/>
-            <a:ext cx="100584" cy="100584"/>
-          </a:xfrm>
-          <a:prstGeom prst="rect">
-            <a:avLst/>
-          </a:prstGeom>
-          <a:solidFill>
-            <a:srgbClr val="00B5E3"/>
-          </a:solidFill>
-          <a:ln>
-            <a:noFill/>
-          </a:ln>
-          <a:effectLst/>
-        </p:spPr>
-        <p:style>
-          <a:lnRef idx="1">
-            <a:schemeClr val="accent1"/>
-          </a:lnRef>
-          <a:fillRef idx="3">
-            <a:schemeClr val="accent1"/>
-          </a:fillRef>
-          <a:effectRef idx="2">
-            <a:schemeClr val="accent1"/>
-          </a:effectRef>
-          <a:fontRef idx="minor">
-            <a:schemeClr val="lt1"/>
-          </a:fontRef>
-        </p:style>
-        <p:txBody>
-          <a:bodyPr rtlCol="0" anchor="ctr"/>
-          <a:lstStyle/>
-          <a:p>
-            <a:pPr algn="ctr"/>
-          </a:p>
-        </p:txBody>
-      </p:sp>
-      <p:sp>
-        <p:nvSpPr>
-          <p:cNvPr id="39" name="TextBox 38"/>
-          <p:cNvSpPr txBox="1"/>
-          <p:nvPr/>
-        </p:nvSpPr>
-        <p:spPr>
-          <a:xfrm>
-            <a:off x="914400" y="3264408"/>
-            <a:ext cx="3520440" cy="365760"/>
-          </a:xfrm>
-          <a:prstGeom prst="rect">
-            <a:avLst/>
-          </a:prstGeom>
-          <a:noFill/>
-        </p:spPr>
-        <p:txBody>
-          <a:bodyPr wrap="square" anchor="t" lIns="27432" rIns="27432" tIns="9144" bIns="9144">
-            <a:spAutoFit/>
-          </a:bodyPr>
-          <a:lstStyle/>
-          <a:p>
-            <a:pPr algn="l">
-              <a:lnSpc>
-                <a:spcPct val="100000"/>
-              </a:lnSpc>
-              <a:spcBef>
-                <a:spcPts val="0"/>
-              </a:spcBef>
-              <a:spcAft>
-                <a:spcPts val="200"/>
-              </a:spcAft>
-            </a:pPr>
-            <a:r>
-              <a:rPr sz="850" b="0" i="0">
+              <a:rPr sz="800" b="0" i="0">
                 <a:solidFill>
                   <a:srgbClr val="5B6782"/>
                 </a:solidFill>
@@ -43827,7 +43629,7 @@
       </p:sp>
       <p:sp>
         <p:nvSpPr>
-          <p:cNvPr id="40" name="Rounded Rectangle 39"/>
+          <p:cNvPr id="38" name="Rounded Rectangle 37"/>
           <p:cNvSpPr/>
           <p:nvPr/>
         </p:nvSpPr>
@@ -43881,7 +43683,7 @@
       </p:sp>
       <p:sp>
         <p:nvSpPr>
-          <p:cNvPr id="41" name="Rectangle 40"/>
+          <p:cNvPr id="39" name="Rectangle 38"/>
           <p:cNvSpPr/>
           <p:nvPr/>
         </p:nvSpPr>
@@ -43925,14 +43727,14 @@
       </p:sp>
       <p:pic>
         <p:nvPicPr>
-          <p:cNvPr id="42" name="Picture 41" descr="ship_crop.jpg"/>
+          <p:cNvPr id="40" name="Picture 39" descr="ship_crop.jpg"/>
           <p:cNvPicPr>
             <a:picLocks noChangeAspect="1"/>
           </p:cNvPicPr>
           <p:nvPr/>
         </p:nvPicPr>
         <p:blipFill>
-          <a:blip r:embed="rId2"/>
+          <a:blip r:embed="rId3"/>
           <a:stretch>
             <a:fillRect/>
           </a:stretch>
@@ -43956,7 +43758,7 @@
       </p:pic>
       <p:sp>
         <p:nvSpPr>
-          <p:cNvPr id="43" name="TextBox 42"/>
+          <p:cNvPr id="41" name="TextBox 40"/>
           <p:cNvSpPr txBox="1"/>
           <p:nvPr/>
         </p:nvSpPr>
@@ -44003,7 +43805,7 @@
       </p:sp>
       <p:sp>
         <p:nvSpPr>
-          <p:cNvPr id="44" name="Rectangle 43"/>
+          <p:cNvPr id="42" name="Rectangle 41"/>
           <p:cNvSpPr/>
           <p:nvPr/>
         </p:nvSpPr>
@@ -44047,7 +43849,7 @@
       </p:sp>
       <p:sp>
         <p:nvSpPr>
-          <p:cNvPr id="45" name="TextBox 44"/>
+          <p:cNvPr id="43" name="TextBox 42"/>
           <p:cNvSpPr txBox="1"/>
           <p:nvPr/>
         </p:nvSpPr>
@@ -44094,7 +43896,7 @@
       </p:sp>
       <p:sp>
         <p:nvSpPr>
-          <p:cNvPr id="46" name="Rectangle 45"/>
+          <p:cNvPr id="44" name="Rectangle 43"/>
           <p:cNvSpPr/>
           <p:nvPr/>
         </p:nvSpPr>
@@ -44138,7 +43940,7 @@
       </p:sp>
       <p:sp>
         <p:nvSpPr>
-          <p:cNvPr id="47" name="TextBox 46"/>
+          <p:cNvPr id="45" name="TextBox 44"/>
           <p:cNvSpPr txBox="1"/>
           <p:nvPr/>
         </p:nvSpPr>
@@ -44185,7 +43987,7 @@
       </p:sp>
       <p:sp>
         <p:nvSpPr>
-          <p:cNvPr id="48" name="Rectangle 47"/>
+          <p:cNvPr id="46" name="Rectangle 45"/>
           <p:cNvSpPr/>
           <p:nvPr/>
         </p:nvSpPr>
@@ -44229,7 +44031,7 @@
       </p:sp>
       <p:sp>
         <p:nvSpPr>
-          <p:cNvPr id="49" name="TextBox 48"/>
+          <p:cNvPr id="47" name="TextBox 46"/>
           <p:cNvSpPr txBox="1"/>
           <p:nvPr/>
         </p:nvSpPr>
@@ -44276,7 +44078,7 @@
       </p:sp>
       <p:sp>
         <p:nvSpPr>
-          <p:cNvPr id="50" name="Rounded Rectangle 49"/>
+          <p:cNvPr id="48" name="Rounded Rectangle 47"/>
           <p:cNvSpPr/>
           <p:nvPr/>
         </p:nvSpPr>
@@ -44336,7 +44138,7 @@
       </p:sp>
       <p:sp>
         <p:nvSpPr>
-          <p:cNvPr id="51" name="Rectangle 50"/>
+          <p:cNvPr id="49" name="Rectangle 48"/>
           <p:cNvSpPr/>
           <p:nvPr/>
         </p:nvSpPr>
@@ -44380,7 +44182,7 @@
       </p:sp>
       <p:sp>
         <p:nvSpPr>
-          <p:cNvPr id="52" name="TextBox 51"/>
+          <p:cNvPr id="50" name="TextBox 49"/>
           <p:cNvSpPr txBox="1"/>
           <p:nvPr/>
         </p:nvSpPr>
@@ -44438,7 +44240,7 @@
       </p:sp>
       <p:sp>
         <p:nvSpPr>
-          <p:cNvPr id="53" name="Rectangle 52"/>
+          <p:cNvPr id="51" name="Rectangle 50"/>
           <p:cNvSpPr/>
           <p:nvPr/>
         </p:nvSpPr>
@@ -44482,7 +44284,7 @@
       </p:sp>
       <p:sp>
         <p:nvSpPr>
-          <p:cNvPr id="54" name="TextBox 53"/>
+          <p:cNvPr id="52" name="TextBox 51"/>
           <p:cNvSpPr txBox="1"/>
           <p:nvPr/>
         </p:nvSpPr>
@@ -44540,7 +44342,7 @@
       </p:sp>
       <p:sp>
         <p:nvSpPr>
-          <p:cNvPr id="55" name="TextBox 54"/>
+          <p:cNvPr id="53" name="TextBox 52"/>
           <p:cNvSpPr txBox="1"/>
           <p:nvPr/>
         </p:nvSpPr>

--- a/NICE-智能座舱-售前方案-master-V2.pptx
+++ b/NICE-智能座舱-售前方案-master-V2.pptx
@@ -3752,7 +3752,7 @@
         <p:spPr>
           <a:xfrm>
             <a:off x="640080" y="1554480"/>
-            <a:ext cx="8046720" cy="1371600"/>
+            <a:ext cx="4937760" cy="1371600"/>
           </a:xfrm>
           <a:prstGeom prst="rect">
             <a:avLst/>
@@ -3777,7 +3777,7 @@
               </a:spcAft>
             </a:pPr>
             <a:r>
-              <a:rPr sz="3300" b="1" i="0">
+              <a:rPr sz="3100" b="1" i="0">
                 <a:solidFill>
                   <a:srgbClr val="FFFFFF"/>
                 </a:solidFill>
@@ -3785,7 +3785,7 @@
                 <a:ea typeface="微软雅黑"/>
                 <a:cs typeface="微软雅黑"/>
               </a:rPr>
-              <a:t>把硬件优势,变成主机厂</a:t>
+              <a:t>把硬件优势,变成</a:t>
             </a:r>
           </a:p>
           <a:p>
@@ -3801,7 +3801,7 @@
               </a:spcAft>
             </a:pPr>
             <a:r>
-              <a:rPr sz="3300" b="1" i="0">
+              <a:rPr sz="3100" b="1" i="0">
                 <a:solidFill>
                   <a:srgbClr val="FFFFFF"/>
                 </a:solidFill>
@@ -3809,10 +3809,23 @@
                 <a:ea typeface="微软雅黑"/>
                 <a:cs typeface="微软雅黑"/>
               </a:rPr>
-              <a:t>面前的 </a:t>
+              <a:t>主机厂面前的</a:t>
             </a:r>
+          </a:p>
+          <a:p>
+            <a:pPr algn="l">
+              <a:lnSpc>
+                <a:spcPct val="105000"/>
+              </a:lnSpc>
+              <a:spcBef>
+                <a:spcPts val="0"/>
+              </a:spcBef>
+              <a:spcAft>
+                <a:spcPts val="200"/>
+              </a:spcAft>
+            </a:pPr>
             <a:r>
-              <a:rPr sz="3300" b="1" i="0">
+              <a:rPr sz="3100" b="1" i="0">
                 <a:solidFill>
                   <a:srgbClr val="C87DFF"/>
                 </a:solidFill>
@@ -3825,16 +3838,99 @@
           </a:p>
         </p:txBody>
       </p:sp>
-      <p:sp>
-        <p:nvSpPr>
-          <p:cNvPr id="17" name="TextBox 16"/>
+      <p:pic>
+        <p:nvPicPr>
+          <p:cNvPr id="17" name="Picture 16" descr="cover.jpg"/>
+          <p:cNvPicPr>
+            <a:picLocks noChangeAspect="1"/>
+          </p:cNvPicPr>
+          <p:nvPr/>
+        </p:nvPicPr>
+        <p:blipFill>
+          <a:blip r:embed="rId2"/>
+          <a:stretch>
+            <a:fillRect/>
+          </a:stretch>
+        </p:blipFill>
+        <p:spPr>
+          <a:xfrm>
+            <a:off x="5120640" y="1417320"/>
+            <a:ext cx="3566160" cy="2468880"/>
+          </a:xfrm>
+          <a:prstGeom prst="rect">
+            <a:avLst/>
+          </a:prstGeom>
+          <a:ln w="15240">
+            <a:solidFill>
+              <a:srgbClr val="354680"/>
+            </a:solidFill>
+          </a:ln>
+          <a:effectLst>
+            <a:outerShdw blurRad="80000" dist="30000" dir="5400000" rotWithShape="0">
+              <a:srgbClr val="17244A">
+                <a:alpha val="78000"/>
+              </a:srgbClr>
+            </a:outerShdw>
+          </a:effectLst>
+        </p:spPr>
+      </p:pic>
+      <p:sp>
+        <p:nvSpPr>
+          <p:cNvPr id="18" name="TextBox 17"/>
           <p:cNvSpPr txBox="1"/>
           <p:nvPr/>
         </p:nvSpPr>
         <p:spPr>
           <a:xfrm>
-            <a:off x="658368" y="3310128"/>
-            <a:ext cx="7863840" cy="365760"/>
+            <a:off x="5120640" y="3913632"/>
+            <a:ext cx="3566160" cy="274320"/>
+          </a:xfrm>
+          <a:prstGeom prst="rect">
+            <a:avLst/>
+          </a:prstGeom>
+          <a:noFill/>
+        </p:spPr>
+        <p:txBody>
+          <a:bodyPr wrap="square" anchor="t" lIns="27432" rIns="27432" tIns="9144" bIns="9144">
+            <a:spAutoFit/>
+          </a:bodyPr>
+          <a:lstStyle/>
+          <a:p>
+            <a:pPr algn="ctr">
+              <a:lnSpc>
+                <a:spcPct val="100000"/>
+              </a:lnSpc>
+              <a:spcBef>
+                <a:spcPts val="0"/>
+              </a:spcBef>
+              <a:spcAft>
+                <a:spcPts val="200"/>
+              </a:spcAft>
+            </a:pPr>
+            <a:r>
+              <a:rPr sz="850" b="1" i="0">
+                <a:solidFill>
+                  <a:srgbClr val="00B5E3"/>
+                </a:solidFill>
+                <a:latin typeface="微软雅黑"/>
+                <a:ea typeface="微软雅黑"/>
+                <a:cs typeface="微软雅黑"/>
+              </a:rPr>
+              <a:t>卓迈 iX-2024 · 红点奖座舱</a:t>
+            </a:r>
+          </a:p>
+        </p:txBody>
+      </p:sp>
+      <p:sp>
+        <p:nvSpPr>
+          <p:cNvPr id="19" name="TextBox 18"/>
+          <p:cNvSpPr txBox="1"/>
+          <p:nvPr/>
+        </p:nvSpPr>
+        <p:spPr>
+          <a:xfrm>
+            <a:off x="658368" y="3383280"/>
+            <a:ext cx="4572000" cy="365760"/>
           </a:xfrm>
           <a:prstGeom prst="rect">
             <a:avLst/>
@@ -3874,7 +3970,7 @@
       </p:sp>
       <p:sp>
         <p:nvSpPr>
-          <p:cNvPr id="18" name="Rectangle 17"/>
+          <p:cNvPr id="20" name="Rectangle 19"/>
           <p:cNvSpPr/>
           <p:nvPr/>
         </p:nvSpPr>
@@ -3918,14 +4014,14 @@
       </p:sp>
       <p:sp>
         <p:nvSpPr>
-          <p:cNvPr id="19" name="TextBox 18"/>
+          <p:cNvPr id="21" name="TextBox 20"/>
           <p:cNvSpPr txBox="1"/>
           <p:nvPr/>
         </p:nvSpPr>
         <p:spPr>
           <a:xfrm>
-            <a:off x="640080" y="4023360"/>
-            <a:ext cx="8046720" cy="365760"/>
+            <a:off x="640080" y="4160520"/>
+            <a:ext cx="4572000" cy="365760"/>
           </a:xfrm>
           <a:prstGeom prst="rect">
             <a:avLst/>
@@ -3969,20 +4065,20 @@
                 <a:ea typeface="微软雅黑"/>
                 <a:cs typeface="微软雅黑"/>
               </a:rPr>
-              <a:t>      面向头部零部件企业(Tier 1)</a:t>
+              <a:t>   面向 Tier 1</a:t>
             </a:r>
           </a:p>
         </p:txBody>
       </p:sp>
       <p:sp>
         <p:nvSpPr>
-          <p:cNvPr id="20" name="TextBox 19"/>
+          <p:cNvPr id="22" name="TextBox 21"/>
           <p:cNvSpPr txBox="1"/>
           <p:nvPr/>
         </p:nvSpPr>
         <p:spPr>
           <a:xfrm>
-            <a:off x="640080" y="4498848"/>
+            <a:off x="640080" y="4590288"/>
             <a:ext cx="8046720" cy="274320"/>
           </a:xfrm>
           <a:prstGeom prst="rect">
@@ -11704,61 +11800,9 @@
           </a:p>
         </p:txBody>
       </p:sp>
-      <p:sp>
-        <p:nvSpPr>
-          <p:cNvPr id="30" name="Oval 29"/>
-          <p:cNvSpPr/>
-          <p:nvPr/>
-        </p:nvSpPr>
-        <p:spPr>
-          <a:xfrm>
-            <a:off x="704088" y="1261872"/>
-            <a:ext cx="512064" cy="512064"/>
-          </a:xfrm>
-          <a:prstGeom prst="ellipse">
-            <a:avLst/>
-          </a:prstGeom>
-          <a:gradFill>
-            <a:gsLst>
-              <a:gs pos="0">
-                <a:srgbClr val="246BFF"/>
-              </a:gs>
-              <a:gs pos="100000">
-                <a:srgbClr val="5A1BDF"/>
-              </a:gs>
-            </a:gsLst>
-            <a:lin ang="2700000" scaled="1"/>
-          </a:gradFill>
-          <a:ln>
-            <a:noFill/>
-          </a:ln>
-          <a:effectLst/>
-        </p:spPr>
-        <p:style>
-          <a:lnRef idx="1">
-            <a:schemeClr val="accent1"/>
-          </a:lnRef>
-          <a:fillRef idx="3">
-            <a:schemeClr val="accent1"/>
-          </a:fillRef>
-          <a:effectRef idx="2">
-            <a:schemeClr val="accent1"/>
-          </a:effectRef>
-          <a:fontRef idx="minor">
-            <a:schemeClr val="lt1"/>
-          </a:fontRef>
-        </p:style>
-        <p:txBody>
-          <a:bodyPr rtlCol="0" anchor="ctr"/>
-          <a:lstStyle/>
-          <a:p>
-            <a:pPr algn="ctr"/>
-          </a:p>
-        </p:txBody>
-      </p:sp>
       <p:pic>
         <p:nvPicPr>
-          <p:cNvPr id="31" name="Picture 30" descr="w-15-7.png"/>
+          <p:cNvPr id="30" name="Picture 29" descr="bench.jpg"/>
           <p:cNvPicPr>
             <a:picLocks noChangeAspect="1"/>
           </p:cNvPicPr>
@@ -11772,24 +11816,36 @@
         </p:blipFill>
         <p:spPr>
           <a:xfrm>
-            <a:off x="826983" y="1384767"/>
-            <a:ext cx="266273" cy="266273"/>
-          </a:xfrm>
-          <a:prstGeom prst="rect">
-            <a:avLst/>
-          </a:prstGeom>
+            <a:off x="640080" y="1216152"/>
+            <a:ext cx="2377440" cy="914400"/>
+          </a:xfrm>
+          <a:prstGeom prst="rect">
+            <a:avLst/>
+          </a:prstGeom>
+          <a:ln w="15240">
+            <a:solidFill>
+              <a:srgbClr val="246BFF"/>
+            </a:solidFill>
+          </a:ln>
+          <a:effectLst>
+            <a:outerShdw blurRad="80000" dist="30000" dir="5400000" rotWithShape="0">
+              <a:srgbClr val="17244A">
+                <a:alpha val="78000"/>
+              </a:srgbClr>
+            </a:outerShdw>
+          </a:effectLst>
         </p:spPr>
       </p:pic>
       <p:sp>
         <p:nvSpPr>
-          <p:cNvPr id="32" name="TextBox 31"/>
+          <p:cNvPr id="31" name="TextBox 30"/>
           <p:cNvSpPr txBox="1"/>
           <p:nvPr/>
         </p:nvSpPr>
         <p:spPr>
           <a:xfrm>
-            <a:off x="1307592" y="1316736"/>
-            <a:ext cx="1783080" cy="411480"/>
+            <a:off x="685800" y="2231136"/>
+            <a:ext cx="2286000" cy="292608"/>
           </a:xfrm>
           <a:prstGeom prst="rect">
             <a:avLst/>
@@ -11797,7 +11853,7 @@
           <a:noFill/>
         </p:spPr>
         <p:txBody>
-          <a:bodyPr wrap="square" anchor="ctr" lIns="27432" rIns="27432" tIns="9144" bIns="9144">
+          <a:bodyPr wrap="square" anchor="t" lIns="27432" rIns="27432" tIns="9144" bIns="9144">
             <a:spAutoFit/>
           </a:bodyPr>
           <a:lstStyle/>
@@ -11824,44 +11880,8 @@
               </a:rPr>
               <a:t>测试台架</a:t>
             </a:r>
-          </a:p>
-        </p:txBody>
-      </p:sp>
-      <p:sp>
-        <p:nvSpPr>
-          <p:cNvPr id="33" name="TextBox 32"/>
-          <p:cNvSpPr txBox="1"/>
-          <p:nvPr/>
-        </p:nvSpPr>
-        <p:spPr>
-          <a:xfrm>
-            <a:off x="685800" y="1883664"/>
-            <a:ext cx="2286000" cy="292608"/>
-          </a:xfrm>
-          <a:prstGeom prst="rect">
-            <a:avLst/>
-          </a:prstGeom>
-          <a:noFill/>
-        </p:spPr>
-        <p:txBody>
-          <a:bodyPr wrap="square" anchor="t" lIns="27432" rIns="27432" tIns="9144" bIns="9144">
-            <a:spAutoFit/>
-          </a:bodyPr>
-          <a:lstStyle/>
-          <a:p>
-            <a:pPr algn="l">
-              <a:lnSpc>
-                <a:spcPct val="100000"/>
-              </a:lnSpc>
-              <a:spcBef>
-                <a:spcPts val="0"/>
-              </a:spcBef>
-              <a:spcAft>
-                <a:spcPts val="200"/>
-              </a:spcAft>
-            </a:pPr>
             <a:r>
-              <a:rPr sz="900" b="1" i="0">
+              <a:rPr sz="850" b="1" i="0">
                 <a:solidFill>
                   <a:srgbClr val="246BFF"/>
                 </a:solidFill>
@@ -11869,21 +11889,21 @@
                 <a:ea typeface="微软雅黑"/>
                 <a:cs typeface="微软雅黑"/>
               </a:rPr>
-              <a:t>把风险提前到样机阶段</a:t>
+              <a:t>  把风险提前到样机阶段</a:t>
             </a:r>
           </a:p>
         </p:txBody>
       </p:sp>
       <p:sp>
         <p:nvSpPr>
-          <p:cNvPr id="34" name="TextBox 33"/>
+          <p:cNvPr id="32" name="TextBox 31"/>
           <p:cNvSpPr txBox="1"/>
           <p:nvPr/>
         </p:nvSpPr>
         <p:spPr>
           <a:xfrm>
-            <a:off x="685800" y="2231136"/>
-            <a:ext cx="2286000" cy="1188720"/>
+            <a:off x="685800" y="2578608"/>
+            <a:ext cx="2286000" cy="868680"/>
           </a:xfrm>
           <a:prstGeom prst="rect">
             <a:avLst/>
@@ -11898,7 +11918,7 @@
           <a:p>
             <a:pPr algn="l">
               <a:lnSpc>
-                <a:spcPct val="125000"/>
+                <a:spcPct val="122000"/>
               </a:lnSpc>
               <a:spcBef>
                 <a:spcPts val="0"/>
@@ -11916,20 +11936,20 @@
                 <a:ea typeface="微软雅黑"/>
                 <a:cs typeface="微软雅黑"/>
               </a:rPr>
-              <a:t>样机进评审室前先在台架把问题出完:总线/信号干涉/娱乐/氛围灯/机构/多屏/散热/多模态/识别</a:t>
+              <a:t>样机进评审室前先在台架把问题出完:总线/信号干涉/氛围灯/机构/多屏/散热/识别</a:t>
             </a:r>
           </a:p>
         </p:txBody>
       </p:sp>
       <p:sp>
         <p:nvSpPr>
-          <p:cNvPr id="35" name="Rounded Rectangle 34"/>
-          <p:cNvSpPr/>
-          <p:nvPr/>
-        </p:nvSpPr>
-        <p:spPr>
-          <a:xfrm>
-            <a:off x="685800" y="3438144"/>
+          <p:cNvPr id="33" name="Rounded Rectangle 32"/>
+          <p:cNvSpPr/>
+          <p:nvPr/>
+        </p:nvSpPr>
+        <p:spPr>
+          <a:xfrm>
+            <a:off x="685800" y="3419856"/>
             <a:ext cx="2286000" cy="347472"/>
           </a:xfrm>
           <a:prstGeom prst="roundRect">
@@ -11971,13 +11991,13 @@
       </p:sp>
       <p:sp>
         <p:nvSpPr>
-          <p:cNvPr id="36" name="TextBox 35"/>
+          <p:cNvPr id="34" name="TextBox 33"/>
           <p:cNvSpPr txBox="1"/>
           <p:nvPr/>
         </p:nvSpPr>
         <p:spPr>
           <a:xfrm>
-            <a:off x="685800" y="3438144"/>
+            <a:off x="685800" y="3419856"/>
             <a:ext cx="2286000" cy="347472"/>
           </a:xfrm>
           <a:prstGeom prst="rect">
@@ -12018,7 +12038,7 @@
       </p:sp>
       <p:sp>
         <p:nvSpPr>
-          <p:cNvPr id="37" name="Rounded Rectangle 36"/>
+          <p:cNvPr id="35" name="Rounded Rectangle 34"/>
           <p:cNvSpPr/>
           <p:nvPr/>
         </p:nvSpPr>
@@ -12072,7 +12092,7 @@
       </p:sp>
       <p:sp>
         <p:nvSpPr>
-          <p:cNvPr id="38" name="Rectangle 37"/>
+          <p:cNvPr id="36" name="Rectangle 35"/>
           <p:cNvSpPr/>
           <p:nvPr/>
         </p:nvSpPr>
@@ -12114,61 +12134,9 @@
           </a:p>
         </p:txBody>
       </p:sp>
-      <p:sp>
-        <p:nvSpPr>
-          <p:cNvPr id="39" name="Oval 38"/>
-          <p:cNvSpPr/>
-          <p:nvPr/>
-        </p:nvSpPr>
-        <p:spPr>
-          <a:xfrm>
-            <a:off x="3474720" y="1261872"/>
-            <a:ext cx="512064" cy="512064"/>
-          </a:xfrm>
-          <a:prstGeom prst="ellipse">
-            <a:avLst/>
-          </a:prstGeom>
-          <a:gradFill>
-            <a:gsLst>
-              <a:gs pos="0">
-                <a:srgbClr val="00B5E3"/>
-              </a:gs>
-              <a:gs pos="100000">
-                <a:srgbClr val="5A1BDF"/>
-              </a:gs>
-            </a:gsLst>
-            <a:lin ang="2700000" scaled="1"/>
-          </a:gradFill>
-          <a:ln>
-            <a:noFill/>
-          </a:ln>
-          <a:effectLst/>
-        </p:spPr>
-        <p:style>
-          <a:lnRef idx="1">
-            <a:schemeClr val="accent1"/>
-          </a:lnRef>
-          <a:fillRef idx="3">
-            <a:schemeClr val="accent1"/>
-          </a:fillRef>
-          <a:effectRef idx="2">
-            <a:schemeClr val="accent1"/>
-          </a:effectRef>
-          <a:fontRef idx="minor">
-            <a:schemeClr val="lt1"/>
-          </a:fontRef>
-        </p:style>
-        <p:txBody>
-          <a:bodyPr rtlCol="0" anchor="ctr"/>
-          <a:lstStyle/>
-          <a:p>
-            <a:pPr algn="ctr"/>
-          </a:p>
-        </p:txBody>
-      </p:sp>
       <p:pic>
         <p:nvPicPr>
-          <p:cNvPr id="40" name="Picture 39" descr="w-24-4.png"/>
+          <p:cNvPr id="37" name="Picture 36" descr="seat.jpg"/>
           <p:cNvPicPr>
             <a:picLocks noChangeAspect="1"/>
           </p:cNvPicPr>
@@ -12182,24 +12150,36 @@
         </p:blipFill>
         <p:spPr>
           <a:xfrm>
-            <a:off x="3597615" y="1384767"/>
-            <a:ext cx="266273" cy="266273"/>
-          </a:xfrm>
-          <a:prstGeom prst="rect">
-            <a:avLst/>
-          </a:prstGeom>
+            <a:off x="3410712" y="1216152"/>
+            <a:ext cx="2377440" cy="914400"/>
+          </a:xfrm>
+          <a:prstGeom prst="rect">
+            <a:avLst/>
+          </a:prstGeom>
+          <a:ln w="15240">
+            <a:solidFill>
+              <a:srgbClr val="00B5E3"/>
+            </a:solidFill>
+          </a:ln>
+          <a:effectLst>
+            <a:outerShdw blurRad="80000" dist="30000" dir="5400000" rotWithShape="0">
+              <a:srgbClr val="17244A">
+                <a:alpha val="78000"/>
+              </a:srgbClr>
+            </a:outerShdw>
+          </a:effectLst>
         </p:spPr>
       </p:pic>
       <p:sp>
         <p:nvSpPr>
-          <p:cNvPr id="41" name="TextBox 40"/>
+          <p:cNvPr id="38" name="TextBox 37"/>
           <p:cNvSpPr txBox="1"/>
           <p:nvPr/>
         </p:nvSpPr>
         <p:spPr>
           <a:xfrm>
-            <a:off x="4078224" y="1316736"/>
-            <a:ext cx="1783080" cy="411480"/>
+            <a:off x="3456432" y="2231136"/>
+            <a:ext cx="2286000" cy="292608"/>
           </a:xfrm>
           <a:prstGeom prst="rect">
             <a:avLst/>
@@ -12207,7 +12187,7 @@
           <a:noFill/>
         </p:spPr>
         <p:txBody>
-          <a:bodyPr wrap="square" anchor="ctr" lIns="27432" rIns="27432" tIns="9144" bIns="9144">
+          <a:bodyPr wrap="square" anchor="t" lIns="27432" rIns="27432" tIns="9144" bIns="9144">
             <a:spAutoFit/>
           </a:bodyPr>
           <a:lstStyle/>
@@ -12234,44 +12214,8 @@
               </a:rPr>
               <a:t>运动机构</a:t>
             </a:r>
-          </a:p>
-        </p:txBody>
-      </p:sp>
-      <p:sp>
-        <p:nvSpPr>
-          <p:cNvPr id="42" name="TextBox 41"/>
-          <p:cNvSpPr txBox="1"/>
-          <p:nvPr/>
-        </p:nvSpPr>
-        <p:spPr>
-          <a:xfrm>
-            <a:off x="3456432" y="1883664"/>
-            <a:ext cx="2286000" cy="292608"/>
-          </a:xfrm>
-          <a:prstGeom prst="rect">
-            <a:avLst/>
-          </a:prstGeom>
-          <a:noFill/>
-        </p:spPr>
-        <p:txBody>
-          <a:bodyPr wrap="square" anchor="t" lIns="27432" rIns="27432" tIns="9144" bIns="9144">
-            <a:spAutoFit/>
-          </a:bodyPr>
-          <a:lstStyle/>
-          <a:p>
-            <a:pPr algn="l">
-              <a:lnSpc>
-                <a:spcPct val="100000"/>
-              </a:lnSpc>
-              <a:spcBef>
-                <a:spcPts val="0"/>
-              </a:spcBef>
-              <a:spcAft>
-                <a:spcPts val="200"/>
-              </a:spcAft>
-            </a:pPr>
             <a:r>
-              <a:rPr sz="900" b="1" i="0">
+              <a:rPr sz="850" b="1" i="0">
                 <a:solidFill>
                   <a:srgbClr val="00B5E3"/>
                 </a:solidFill>
@@ -12279,21 +12223,21 @@
                 <a:ea typeface="微软雅黑"/>
                 <a:cs typeface="微软雅黑"/>
               </a:rPr>
-              <a:t>最难的开闭件已到量产级</a:t>
+              <a:t>  最难的开闭件已到量产级</a:t>
             </a:r>
           </a:p>
         </p:txBody>
       </p:sp>
       <p:sp>
         <p:nvSpPr>
-          <p:cNvPr id="43" name="TextBox 42"/>
+          <p:cNvPr id="39" name="TextBox 38"/>
           <p:cNvSpPr txBox="1"/>
           <p:nvPr/>
         </p:nvSpPr>
         <p:spPr>
           <a:xfrm>
-            <a:off x="3456432" y="2231136"/>
-            <a:ext cx="2286000" cy="1188720"/>
+            <a:off x="3456432" y="2578608"/>
+            <a:ext cx="2286000" cy="868680"/>
           </a:xfrm>
           <a:prstGeom prst="rect">
             <a:avLst/>
@@ -12308,7 +12252,7 @@
           <a:p>
             <a:pPr algn="l">
               <a:lnSpc>
-                <a:spcPct val="125000"/>
+                <a:spcPct val="122000"/>
               </a:lnSpc>
               <a:spcBef>
                 <a:spcPts val="0"/>
@@ -12326,20 +12270,20 @@
                 <a:ea typeface="微软雅黑"/>
                 <a:cs typeface="微软雅黑"/>
               </a:rPr>
-              <a:t>折叠方向盘达上汽乘用车量产级并完成装车联调;鸥翼门/侧门应用于百度 Apollo</a:t>
+              <a:t>折叠方向盘达上汽乘用车量产级并装车联调;鸥翼门/侧门应用于百度 Apollo</a:t>
             </a:r>
           </a:p>
         </p:txBody>
       </p:sp>
       <p:sp>
         <p:nvSpPr>
-          <p:cNvPr id="44" name="Rounded Rectangle 43"/>
-          <p:cNvSpPr/>
-          <p:nvPr/>
-        </p:nvSpPr>
-        <p:spPr>
-          <a:xfrm>
-            <a:off x="3456432" y="3438144"/>
+          <p:cNvPr id="40" name="Rounded Rectangle 39"/>
+          <p:cNvSpPr/>
+          <p:nvPr/>
+        </p:nvSpPr>
+        <p:spPr>
+          <a:xfrm>
+            <a:off x="3456432" y="3419856"/>
             <a:ext cx="2286000" cy="347472"/>
           </a:xfrm>
           <a:prstGeom prst="roundRect">
@@ -12381,13 +12325,13 @@
       </p:sp>
       <p:sp>
         <p:nvSpPr>
-          <p:cNvPr id="45" name="TextBox 44"/>
+          <p:cNvPr id="41" name="TextBox 40"/>
           <p:cNvSpPr txBox="1"/>
           <p:nvPr/>
         </p:nvSpPr>
         <p:spPr>
           <a:xfrm>
-            <a:off x="3456432" y="3438144"/>
+            <a:off x="3456432" y="3419856"/>
             <a:ext cx="2286000" cy="347472"/>
           </a:xfrm>
           <a:prstGeom prst="rect">
@@ -12428,7 +12372,7 @@
       </p:sp>
       <p:sp>
         <p:nvSpPr>
-          <p:cNvPr id="46" name="Rounded Rectangle 45"/>
+          <p:cNvPr id="42" name="Rounded Rectangle 41"/>
           <p:cNvSpPr/>
           <p:nvPr/>
         </p:nvSpPr>
@@ -12482,7 +12426,7 @@
       </p:sp>
       <p:sp>
         <p:nvSpPr>
-          <p:cNvPr id="47" name="Rectangle 46"/>
+          <p:cNvPr id="43" name="Rectangle 42"/>
           <p:cNvSpPr/>
           <p:nvPr/>
         </p:nvSpPr>
@@ -12524,61 +12468,9 @@
           </a:p>
         </p:txBody>
       </p:sp>
-      <p:sp>
-        <p:nvSpPr>
-          <p:cNvPr id="48" name="Oval 47"/>
-          <p:cNvSpPr/>
-          <p:nvPr/>
-        </p:nvSpPr>
-        <p:spPr>
-          <a:xfrm>
-            <a:off x="6245352" y="1261872"/>
-            <a:ext cx="512064" cy="512064"/>
-          </a:xfrm>
-          <a:prstGeom prst="ellipse">
-            <a:avLst/>
-          </a:prstGeom>
-          <a:gradFill>
-            <a:gsLst>
-              <a:gs pos="0">
-                <a:srgbClr val="7D3CFF"/>
-              </a:gs>
-              <a:gs pos="100000">
-                <a:srgbClr val="5A1BDF"/>
-              </a:gs>
-            </a:gsLst>
-            <a:lin ang="2700000" scaled="1"/>
-          </a:gradFill>
-          <a:ln>
-            <a:noFill/>
-          </a:ln>
-          <a:effectLst/>
-        </p:spPr>
-        <p:style>
-          <a:lnRef idx="1">
-            <a:schemeClr val="accent1"/>
-          </a:lnRef>
-          <a:fillRef idx="3">
-            <a:schemeClr val="accent1"/>
-          </a:fillRef>
-          <a:effectRef idx="2">
-            <a:schemeClr val="accent1"/>
-          </a:effectRef>
-          <a:fontRef idx="minor">
-            <a:schemeClr val="lt1"/>
-          </a:fontRef>
-        </p:style>
-        <p:txBody>
-          <a:bodyPr rtlCol="0" anchor="ctr"/>
-          <a:lstStyle/>
-          <a:p>
-            <a:pPr algn="ctr"/>
-          </a:p>
-        </p:txBody>
-      </p:sp>
       <p:pic>
         <p:nvPicPr>
-          <p:cNvPr id="49" name="Picture 48" descr="w-13-4.png"/>
+          <p:cNvPr id="44" name="Picture 43" descr="ctrl.jpg"/>
           <p:cNvPicPr>
             <a:picLocks noChangeAspect="1"/>
           </p:cNvPicPr>
@@ -12592,24 +12484,36 @@
         </p:blipFill>
         <p:spPr>
           <a:xfrm>
-            <a:off x="6368247" y="1384767"/>
-            <a:ext cx="266273" cy="266273"/>
-          </a:xfrm>
-          <a:prstGeom prst="rect">
-            <a:avLst/>
-          </a:prstGeom>
+            <a:off x="6181344" y="1216152"/>
+            <a:ext cx="2377440" cy="914400"/>
+          </a:xfrm>
+          <a:prstGeom prst="rect">
+            <a:avLst/>
+          </a:prstGeom>
+          <a:ln w="15240">
+            <a:solidFill>
+              <a:srgbClr val="7D3CFF"/>
+            </a:solidFill>
+          </a:ln>
+          <a:effectLst>
+            <a:outerShdw blurRad="80000" dist="30000" dir="5400000" rotWithShape="0">
+              <a:srgbClr val="17244A">
+                <a:alpha val="78000"/>
+              </a:srgbClr>
+            </a:outerShdw>
+          </a:effectLst>
         </p:spPr>
       </p:pic>
       <p:sp>
         <p:nvSpPr>
-          <p:cNvPr id="50" name="TextBox 49"/>
+          <p:cNvPr id="45" name="TextBox 44"/>
           <p:cNvSpPr txBox="1"/>
           <p:nvPr/>
         </p:nvSpPr>
         <p:spPr>
           <a:xfrm>
-            <a:off x="6848856" y="1316736"/>
-            <a:ext cx="1783080" cy="411480"/>
+            <a:off x="6227064" y="2231136"/>
+            <a:ext cx="2286000" cy="292608"/>
           </a:xfrm>
           <a:prstGeom prst="rect">
             <a:avLst/>
@@ -12617,7 +12521,7 @@
           <a:noFill/>
         </p:spPr>
         <p:txBody>
-          <a:bodyPr wrap="square" anchor="ctr" lIns="27432" rIns="27432" tIns="9144" bIns="9144">
+          <a:bodyPr wrap="square" anchor="t" lIns="27432" rIns="27432" tIns="9144" bIns="9144">
             <a:spAutoFit/>
           </a:bodyPr>
           <a:lstStyle/>
@@ -12644,44 +12548,8 @@
               </a:rPr>
               <a:t>自研车规控制器</a:t>
             </a:r>
-          </a:p>
-        </p:txBody>
-      </p:sp>
-      <p:sp>
-        <p:nvSpPr>
-          <p:cNvPr id="51" name="TextBox 50"/>
-          <p:cNvSpPr txBox="1"/>
-          <p:nvPr/>
-        </p:nvSpPr>
-        <p:spPr>
-          <a:xfrm>
-            <a:off x="6227064" y="1883664"/>
-            <a:ext cx="2286000" cy="292608"/>
-          </a:xfrm>
-          <a:prstGeom prst="rect">
-            <a:avLst/>
-          </a:prstGeom>
-          <a:noFill/>
-        </p:spPr>
-        <p:txBody>
-          <a:bodyPr wrap="square" anchor="t" lIns="27432" rIns="27432" tIns="9144" bIns="9144">
-            <a:spAutoFit/>
-          </a:bodyPr>
-          <a:lstStyle/>
-          <a:p>
-            <a:pPr algn="l">
-              <a:lnSpc>
-                <a:spcPct val="100000"/>
-              </a:lnSpc>
-              <a:spcBef>
-                <a:spcPts val="0"/>
-              </a:spcBef>
-              <a:spcAft>
-                <a:spcPts val="200"/>
-              </a:spcAft>
-            </a:pPr>
             <a:r>
-              <a:rPr sz="900" b="1" i="0">
+              <a:rPr sz="850" b="1" i="0">
                 <a:solidFill>
                   <a:srgbClr val="7D3CFF"/>
                 </a:solidFill>
@@ -12689,21 +12557,21 @@
                 <a:ea typeface="微软雅黑"/>
                 <a:cs typeface="微软雅黑"/>
               </a:rPr>
-              <a:t>软硬件是自己的,不外包</a:t>
+              <a:t>  软硬件是自己的,不外包</a:t>
             </a:r>
           </a:p>
         </p:txBody>
       </p:sp>
       <p:sp>
         <p:nvSpPr>
-          <p:cNvPr id="52" name="TextBox 51"/>
+          <p:cNvPr id="46" name="TextBox 45"/>
           <p:cNvSpPr txBox="1"/>
           <p:nvPr/>
         </p:nvSpPr>
         <p:spPr>
           <a:xfrm>
-            <a:off x="6227064" y="2231136"/>
-            <a:ext cx="2286000" cy="1188720"/>
+            <a:off x="6227064" y="2578608"/>
+            <a:ext cx="2286000" cy="868680"/>
           </a:xfrm>
           <a:prstGeom prst="rect">
             <a:avLst/>
@@ -12718,7 +12586,7 @@
           <a:p>
             <a:pPr algn="l">
               <a:lnSpc>
-                <a:spcPct val="125000"/>
+                <a:spcPct val="122000"/>
               </a:lnSpc>
               <a:spcBef>
                 <a:spcPts val="0"/>
@@ -12736,20 +12604,20 @@
                 <a:ea typeface="微软雅黑"/>
                 <a:cs typeface="微软雅黑"/>
               </a:rPr>
-              <a:t>已自研 5 类实物控制器:通用/多路通断/RGB 氛围灯/三相电机驱动/小型舵机</a:t>
+              <a:t>已自研 5 类实物控制器:通用/多路通断/RGB氛围灯/三相电机/小型舵机</a:t>
             </a:r>
           </a:p>
         </p:txBody>
       </p:sp>
       <p:sp>
         <p:nvSpPr>
-          <p:cNvPr id="53" name="Rounded Rectangle 52"/>
-          <p:cNvSpPr/>
-          <p:nvPr/>
-        </p:nvSpPr>
-        <p:spPr>
-          <a:xfrm>
-            <a:off x="6227064" y="3438144"/>
+          <p:cNvPr id="47" name="Rounded Rectangle 46"/>
+          <p:cNvSpPr/>
+          <p:nvPr/>
+        </p:nvSpPr>
+        <p:spPr>
+          <a:xfrm>
+            <a:off x="6227064" y="3419856"/>
             <a:ext cx="2286000" cy="347472"/>
           </a:xfrm>
           <a:prstGeom prst="roundRect">
@@ -12791,13 +12659,13 @@
       </p:sp>
       <p:sp>
         <p:nvSpPr>
-          <p:cNvPr id="54" name="TextBox 53"/>
+          <p:cNvPr id="48" name="TextBox 47"/>
           <p:cNvSpPr txBox="1"/>
           <p:nvPr/>
         </p:nvSpPr>
         <p:spPr>
           <a:xfrm>
-            <a:off x="6227064" y="3438144"/>
+            <a:off x="6227064" y="3419856"/>
             <a:ext cx="2286000" cy="347472"/>
           </a:xfrm>
           <a:prstGeom prst="rect">
@@ -12838,7 +12706,7 @@
       </p:sp>
       <p:sp>
         <p:nvSpPr>
-          <p:cNvPr id="55" name="Rounded Rectangle 54"/>
+          <p:cNvPr id="49" name="Rounded Rectangle 48"/>
           <p:cNvSpPr/>
           <p:nvPr/>
         </p:nvSpPr>
@@ -12898,7 +12766,7 @@
       </p:sp>
       <p:sp>
         <p:nvSpPr>
-          <p:cNvPr id="56" name="Rectangle 55"/>
+          <p:cNvPr id="50" name="Rectangle 49"/>
           <p:cNvSpPr/>
           <p:nvPr/>
         </p:nvSpPr>
@@ -12942,7 +12810,7 @@
       </p:sp>
       <p:sp>
         <p:nvSpPr>
-          <p:cNvPr id="57" name="TextBox 56"/>
+          <p:cNvPr id="51" name="TextBox 50"/>
           <p:cNvSpPr txBox="1"/>
           <p:nvPr/>
         </p:nvSpPr>
@@ -13000,7 +12868,7 @@
       </p:sp>
       <p:sp>
         <p:nvSpPr>
-          <p:cNvPr id="58" name="Rectangle 57"/>
+          <p:cNvPr id="52" name="Rectangle 51"/>
           <p:cNvSpPr/>
           <p:nvPr/>
         </p:nvSpPr>
@@ -13044,7 +12912,7 @@
       </p:sp>
       <p:sp>
         <p:nvSpPr>
-          <p:cNvPr id="59" name="TextBox 58"/>
+          <p:cNvPr id="53" name="TextBox 52"/>
           <p:cNvSpPr txBox="1"/>
           <p:nvPr/>
         </p:nvSpPr>
@@ -13102,7 +12970,7 @@
       </p:sp>
       <p:sp>
         <p:nvSpPr>
-          <p:cNvPr id="60" name="TextBox 59"/>
+          <p:cNvPr id="54" name="TextBox 53"/>
           <p:cNvSpPr txBox="1"/>
           <p:nvPr/>
         </p:nvSpPr>

--- a/NICE-智能座舱-售前方案-master-V2.pptx
+++ b/NICE-智能座舱-售前方案-master-V2.pptx
@@ -4150,1275 +4150,8 @@
             <a:avLst/>
           </a:prstGeom>
           <a:solidFill>
-            <a:srgbClr val="FFFFFF"/>
-          </a:solidFill>
-          <a:ln>
-            <a:noFill/>
-          </a:ln>
-          <a:effectLst/>
-        </p:spPr>
-        <p:style>
-          <a:lnRef idx="1">
-            <a:schemeClr val="accent1"/>
-          </a:lnRef>
-          <a:fillRef idx="3">
-            <a:schemeClr val="accent1"/>
-          </a:fillRef>
-          <a:effectRef idx="2">
-            <a:schemeClr val="accent1"/>
-          </a:effectRef>
-          <a:fontRef idx="minor">
-            <a:schemeClr val="lt1"/>
-          </a:fontRef>
-        </p:style>
-        <p:txBody>
-          <a:bodyPr rtlCol="0" anchor="ctr"/>
-          <a:lstStyle/>
-          <a:p>
-            <a:pPr algn="ctr"/>
-          </a:p>
-        </p:txBody>
-      </p:sp>
-      <p:sp>
-        <p:nvSpPr>
-          <p:cNvPr id="3" name="Rectangle 2"/>
-          <p:cNvSpPr/>
-          <p:nvPr/>
-        </p:nvSpPr>
-        <p:spPr>
-          <a:xfrm>
-            <a:off x="0" y="0"/>
-            <a:ext cx="9144000" cy="841248"/>
-          </a:xfrm>
-          <a:prstGeom prst="rect">
-            <a:avLst/>
-          </a:prstGeom>
-          <a:gradFill>
-            <a:gsLst>
-              <a:gs pos="0">
-                <a:srgbClr val="0A1A3D"/>
-              </a:gs>
-              <a:gs pos="100000">
-                <a:srgbClr val="1B448E"/>
-              </a:gs>
-            </a:gsLst>
-            <a:lin ang="0" scaled="1"/>
-          </a:gradFill>
-          <a:ln>
-            <a:noFill/>
-          </a:ln>
-          <a:effectLst/>
-        </p:spPr>
-        <p:style>
-          <a:lnRef idx="1">
-            <a:schemeClr val="accent1"/>
-          </a:lnRef>
-          <a:fillRef idx="3">
-            <a:schemeClr val="accent1"/>
-          </a:fillRef>
-          <a:effectRef idx="2">
-            <a:schemeClr val="accent1"/>
-          </a:effectRef>
-          <a:fontRef idx="minor">
-            <a:schemeClr val="lt1"/>
-          </a:fontRef>
-        </p:style>
-        <p:txBody>
-          <a:bodyPr rtlCol="0" anchor="ctr"/>
-          <a:lstStyle/>
-          <a:p>
-            <a:pPr algn="ctr"/>
-          </a:p>
-        </p:txBody>
-      </p:sp>
-      <p:sp>
-        <p:nvSpPr>
-          <p:cNvPr id="4" name="Rectangle 3"/>
-          <p:cNvSpPr/>
-          <p:nvPr/>
-        </p:nvSpPr>
-        <p:spPr>
-          <a:xfrm>
-            <a:off x="0" y="0"/>
-            <a:ext cx="841248" cy="841248"/>
-          </a:xfrm>
-          <a:prstGeom prst="rect">
-            <a:avLst/>
-          </a:prstGeom>
-          <a:solidFill>
-            <a:srgbClr val="0A1A3D"/>
-          </a:solidFill>
-          <a:ln>
-            <a:noFill/>
-          </a:ln>
-          <a:effectLst/>
-        </p:spPr>
-        <p:style>
-          <a:lnRef idx="1">
-            <a:schemeClr val="accent1"/>
-          </a:lnRef>
-          <a:fillRef idx="3">
-            <a:schemeClr val="accent1"/>
-          </a:fillRef>
-          <a:effectRef idx="2">
-            <a:schemeClr val="accent1"/>
-          </a:effectRef>
-          <a:fontRef idx="minor">
-            <a:schemeClr val="lt1"/>
-          </a:fontRef>
-        </p:style>
-        <p:txBody>
-          <a:bodyPr rtlCol="0" anchor="ctr"/>
-          <a:lstStyle/>
-          <a:p>
-            <a:pPr algn="ctr"/>
-          </a:p>
-        </p:txBody>
-      </p:sp>
-      <p:sp>
-        <p:nvSpPr>
-          <p:cNvPr id="5" name="Rectangle 4"/>
-          <p:cNvSpPr/>
-          <p:nvPr/>
-        </p:nvSpPr>
-        <p:spPr>
-          <a:xfrm>
-            <a:off x="841248" y="0"/>
-            <a:ext cx="41148" cy="841248"/>
-          </a:xfrm>
-          <a:prstGeom prst="rect">
-            <a:avLst/>
-          </a:prstGeom>
-          <a:solidFill>
-            <a:srgbClr val="246BFF"/>
-          </a:solidFill>
-          <a:ln>
-            <a:noFill/>
-          </a:ln>
-          <a:effectLst/>
-        </p:spPr>
-        <p:style>
-          <a:lnRef idx="1">
-            <a:schemeClr val="accent1"/>
-          </a:lnRef>
-          <a:fillRef idx="3">
-            <a:schemeClr val="accent1"/>
-          </a:fillRef>
-          <a:effectRef idx="2">
-            <a:schemeClr val="accent1"/>
-          </a:effectRef>
-          <a:fontRef idx="minor">
-            <a:schemeClr val="lt1"/>
-          </a:fontRef>
-        </p:style>
-        <p:txBody>
-          <a:bodyPr rtlCol="0" anchor="ctr"/>
-          <a:lstStyle/>
-          <a:p>
-            <a:pPr algn="ctr"/>
-          </a:p>
-        </p:txBody>
-      </p:sp>
-      <p:sp>
-        <p:nvSpPr>
-          <p:cNvPr id="6" name="TextBox 5"/>
-          <p:cNvSpPr txBox="1"/>
-          <p:nvPr/>
-        </p:nvSpPr>
-        <p:spPr>
-          <a:xfrm>
-            <a:off x="0" y="0"/>
-            <a:ext cx="841248" cy="841248"/>
-          </a:xfrm>
-          <a:prstGeom prst="rect">
-            <a:avLst/>
-          </a:prstGeom>
-          <a:noFill/>
-        </p:spPr>
-        <p:txBody>
-          <a:bodyPr wrap="square" anchor="ctr" lIns="27432" rIns="27432" tIns="9144" bIns="9144">
-            <a:spAutoFit/>
-          </a:bodyPr>
-          <a:lstStyle/>
-          <a:p>
-            <a:pPr algn="ctr">
-              <a:lnSpc>
-                <a:spcPct val="100000"/>
-              </a:lnSpc>
-              <a:spcBef>
-                <a:spcPts val="0"/>
-              </a:spcBef>
-              <a:spcAft>
-                <a:spcPts val="200"/>
-              </a:spcAft>
-            </a:pPr>
-            <a:r>
-              <a:rPr sz="2400" b="1" i="0">
-                <a:solidFill>
-                  <a:srgbClr val="FFFFFF"/>
-                </a:solidFill>
-                <a:latin typeface="Arial"/>
-                <a:ea typeface="Arial"/>
-                <a:cs typeface="Arial"/>
-              </a:rPr>
-              <a:t>10</a:t>
-            </a:r>
-          </a:p>
-        </p:txBody>
-      </p:sp>
-      <p:sp>
-        <p:nvSpPr>
-          <p:cNvPr id="7" name="TextBox 6"/>
-          <p:cNvSpPr txBox="1"/>
-          <p:nvPr/>
-        </p:nvSpPr>
-        <p:spPr>
-          <a:xfrm>
-            <a:off x="1078992" y="146304"/>
-            <a:ext cx="6766560" cy="411480"/>
-          </a:xfrm>
-          <a:prstGeom prst="rect">
-            <a:avLst/>
-          </a:prstGeom>
-          <a:noFill/>
-        </p:spPr>
-        <p:txBody>
-          <a:bodyPr wrap="square" anchor="t" lIns="27432" rIns="27432" tIns="9144" bIns="9144">
-            <a:spAutoFit/>
-          </a:bodyPr>
-          <a:lstStyle/>
-          <a:p>
-            <a:pPr algn="l">
-              <a:lnSpc>
-                <a:spcPct val="100000"/>
-              </a:lnSpc>
-              <a:spcBef>
-                <a:spcPts val="0"/>
-              </a:spcBef>
-              <a:spcAft>
-                <a:spcPts val="200"/>
-              </a:spcAft>
-            </a:pPr>
-            <a:r>
-              <a:rPr sz="1700" b="1" i="0">
-                <a:solidFill>
-                  <a:srgbClr val="FFFFFF"/>
-                </a:solidFill>
-                <a:latin typeface="微软雅黑"/>
-                <a:ea typeface="微软雅黑"/>
-                <a:cs typeface="微软雅黑"/>
-              </a:rPr>
-              <a:t>组织协同:四大能力中心,收敛于一个责任主体</a:t>
-            </a:r>
-          </a:p>
-        </p:txBody>
-      </p:sp>
-      <p:sp>
-        <p:nvSpPr>
-          <p:cNvPr id="8" name="TextBox 7"/>
-          <p:cNvSpPr txBox="1"/>
-          <p:nvPr/>
-        </p:nvSpPr>
-        <p:spPr>
-          <a:xfrm>
-            <a:off x="1097280" y="548640"/>
-            <a:ext cx="6766560" cy="228600"/>
-          </a:xfrm>
-          <a:prstGeom prst="rect">
-            <a:avLst/>
-          </a:prstGeom>
-          <a:noFill/>
-        </p:spPr>
-        <p:txBody>
-          <a:bodyPr wrap="square" anchor="t" lIns="27432" rIns="27432" tIns="9144" bIns="9144">
-            <a:spAutoFit/>
-          </a:bodyPr>
-          <a:lstStyle/>
-          <a:p>
-            <a:pPr algn="l">
-              <a:lnSpc>
-                <a:spcPct val="100000"/>
-              </a:lnSpc>
-              <a:spcBef>
-                <a:spcPts val="0"/>
-              </a:spcBef>
-              <a:spcAft>
-                <a:spcPts val="200"/>
-              </a:spcAft>
-            </a:pPr>
-            <a:r>
-              <a:rPr sz="900" b="1" i="0">
-                <a:solidFill>
-                  <a:srgbClr val="8FB2F0"/>
-                </a:solidFill>
-                <a:latin typeface="Arial"/>
-                <a:ea typeface="Arial"/>
-                <a:cs typeface="Arial"/>
-              </a:rPr>
-              <a:t>ONE-STOP ACCOUNTABILITY</a:t>
-            </a:r>
-          </a:p>
-        </p:txBody>
-      </p:sp>
-      <p:sp>
-        <p:nvSpPr>
-          <p:cNvPr id="9" name="Oval 8"/>
-          <p:cNvSpPr/>
-          <p:nvPr/>
-        </p:nvSpPr>
-        <p:spPr>
-          <a:xfrm>
-            <a:off x="7818120" y="201168"/>
-            <a:ext cx="41148" cy="41148"/>
-          </a:xfrm>
-          <a:prstGeom prst="ellipse">
-            <a:avLst/>
-          </a:prstGeom>
-          <a:solidFill>
-            <a:srgbClr val="3A5C9E"/>
-          </a:solidFill>
-          <a:ln>
-            <a:noFill/>
-          </a:ln>
-          <a:effectLst/>
-        </p:spPr>
-        <p:style>
-          <a:lnRef idx="1">
-            <a:schemeClr val="accent1"/>
-          </a:lnRef>
-          <a:fillRef idx="3">
-            <a:schemeClr val="accent1"/>
-          </a:fillRef>
-          <a:effectRef idx="2">
-            <a:schemeClr val="accent1"/>
-          </a:effectRef>
-          <a:fontRef idx="minor">
-            <a:schemeClr val="lt1"/>
-          </a:fontRef>
-        </p:style>
-        <p:txBody>
-          <a:bodyPr rtlCol="0" anchor="ctr"/>
-          <a:lstStyle/>
-          <a:p>
-            <a:pPr algn="ctr"/>
-          </a:p>
-        </p:txBody>
-      </p:sp>
-      <p:sp>
-        <p:nvSpPr>
-          <p:cNvPr id="10" name="Oval 9"/>
-          <p:cNvSpPr/>
-          <p:nvPr/>
-        </p:nvSpPr>
-        <p:spPr>
-          <a:xfrm>
-            <a:off x="7964424" y="201168"/>
-            <a:ext cx="41148" cy="41148"/>
-          </a:xfrm>
-          <a:prstGeom prst="ellipse">
-            <a:avLst/>
-          </a:prstGeom>
-          <a:solidFill>
-            <a:srgbClr val="3A5C9E"/>
-          </a:solidFill>
-          <a:ln>
-            <a:noFill/>
-          </a:ln>
-          <a:effectLst/>
-        </p:spPr>
-        <p:style>
-          <a:lnRef idx="1">
-            <a:schemeClr val="accent1"/>
-          </a:lnRef>
-          <a:fillRef idx="3">
-            <a:schemeClr val="accent1"/>
-          </a:fillRef>
-          <a:effectRef idx="2">
-            <a:schemeClr val="accent1"/>
-          </a:effectRef>
-          <a:fontRef idx="minor">
-            <a:schemeClr val="lt1"/>
-          </a:fontRef>
-        </p:style>
-        <p:txBody>
-          <a:bodyPr rtlCol="0" anchor="ctr"/>
-          <a:lstStyle/>
-          <a:p>
-            <a:pPr algn="ctr"/>
-          </a:p>
-        </p:txBody>
-      </p:sp>
-      <p:sp>
-        <p:nvSpPr>
-          <p:cNvPr id="11" name="Oval 10"/>
-          <p:cNvSpPr/>
-          <p:nvPr/>
-        </p:nvSpPr>
-        <p:spPr>
-          <a:xfrm>
-            <a:off x="8110728" y="201168"/>
-            <a:ext cx="41148" cy="41148"/>
-          </a:xfrm>
-          <a:prstGeom prst="ellipse">
-            <a:avLst/>
-          </a:prstGeom>
-          <a:solidFill>
-            <a:srgbClr val="3A5C9E"/>
-          </a:solidFill>
-          <a:ln>
-            <a:noFill/>
-          </a:ln>
-          <a:effectLst/>
-        </p:spPr>
-        <p:style>
-          <a:lnRef idx="1">
-            <a:schemeClr val="accent1"/>
-          </a:lnRef>
-          <a:fillRef idx="3">
-            <a:schemeClr val="accent1"/>
-          </a:fillRef>
-          <a:effectRef idx="2">
-            <a:schemeClr val="accent1"/>
-          </a:effectRef>
-          <a:fontRef idx="minor">
-            <a:schemeClr val="lt1"/>
-          </a:fontRef>
-        </p:style>
-        <p:txBody>
-          <a:bodyPr rtlCol="0" anchor="ctr"/>
-          <a:lstStyle/>
-          <a:p>
-            <a:pPr algn="ctr"/>
-          </a:p>
-        </p:txBody>
-      </p:sp>
-      <p:sp>
-        <p:nvSpPr>
-          <p:cNvPr id="12" name="Oval 11"/>
-          <p:cNvSpPr/>
-          <p:nvPr/>
-        </p:nvSpPr>
-        <p:spPr>
-          <a:xfrm>
-            <a:off x="8257032" y="201168"/>
-            <a:ext cx="41148" cy="41148"/>
-          </a:xfrm>
-          <a:prstGeom prst="ellipse">
-            <a:avLst/>
-          </a:prstGeom>
-          <a:solidFill>
-            <a:srgbClr val="3A5C9E"/>
-          </a:solidFill>
-          <a:ln>
-            <a:noFill/>
-          </a:ln>
-          <a:effectLst/>
-        </p:spPr>
-        <p:style>
-          <a:lnRef idx="1">
-            <a:schemeClr val="accent1"/>
-          </a:lnRef>
-          <a:fillRef idx="3">
-            <a:schemeClr val="accent1"/>
-          </a:fillRef>
-          <a:effectRef idx="2">
-            <a:schemeClr val="accent1"/>
-          </a:effectRef>
-          <a:fontRef idx="minor">
-            <a:schemeClr val="lt1"/>
-          </a:fontRef>
-        </p:style>
-        <p:txBody>
-          <a:bodyPr rtlCol="0" anchor="ctr"/>
-          <a:lstStyle/>
-          <a:p>
-            <a:pPr algn="ctr"/>
-          </a:p>
-        </p:txBody>
-      </p:sp>
-      <p:sp>
-        <p:nvSpPr>
-          <p:cNvPr id="13" name="Oval 12"/>
-          <p:cNvSpPr/>
-          <p:nvPr/>
-        </p:nvSpPr>
-        <p:spPr>
-          <a:xfrm>
-            <a:off x="8403336" y="201168"/>
-            <a:ext cx="41148" cy="41148"/>
-          </a:xfrm>
-          <a:prstGeom prst="ellipse">
-            <a:avLst/>
-          </a:prstGeom>
-          <a:solidFill>
-            <a:srgbClr val="3A5C9E"/>
-          </a:solidFill>
-          <a:ln>
-            <a:noFill/>
-          </a:ln>
-          <a:effectLst/>
-        </p:spPr>
-        <p:style>
-          <a:lnRef idx="1">
-            <a:schemeClr val="accent1"/>
-          </a:lnRef>
-          <a:fillRef idx="3">
-            <a:schemeClr val="accent1"/>
-          </a:fillRef>
-          <a:effectRef idx="2">
-            <a:schemeClr val="accent1"/>
-          </a:effectRef>
-          <a:fontRef idx="minor">
-            <a:schemeClr val="lt1"/>
-          </a:fontRef>
-        </p:style>
-        <p:txBody>
-          <a:bodyPr rtlCol="0" anchor="ctr"/>
-          <a:lstStyle/>
-          <a:p>
-            <a:pPr algn="ctr"/>
-          </a:p>
-        </p:txBody>
-      </p:sp>
-      <p:sp>
-        <p:nvSpPr>
-          <p:cNvPr id="14" name="Oval 13"/>
-          <p:cNvSpPr/>
-          <p:nvPr/>
-        </p:nvSpPr>
-        <p:spPr>
-          <a:xfrm>
-            <a:off x="8549640" y="201168"/>
-            <a:ext cx="41148" cy="41148"/>
-          </a:xfrm>
-          <a:prstGeom prst="ellipse">
-            <a:avLst/>
-          </a:prstGeom>
-          <a:solidFill>
-            <a:srgbClr val="3A5C9E"/>
-          </a:solidFill>
-          <a:ln>
-            <a:noFill/>
-          </a:ln>
-          <a:effectLst/>
-        </p:spPr>
-        <p:style>
-          <a:lnRef idx="1">
-            <a:schemeClr val="accent1"/>
-          </a:lnRef>
-          <a:fillRef idx="3">
-            <a:schemeClr val="accent1"/>
-          </a:fillRef>
-          <a:effectRef idx="2">
-            <a:schemeClr val="accent1"/>
-          </a:effectRef>
-          <a:fontRef idx="minor">
-            <a:schemeClr val="lt1"/>
-          </a:fontRef>
-        </p:style>
-        <p:txBody>
-          <a:bodyPr rtlCol="0" anchor="ctr"/>
-          <a:lstStyle/>
-          <a:p>
-            <a:pPr algn="ctr"/>
-          </a:p>
-        </p:txBody>
-      </p:sp>
-      <p:sp>
-        <p:nvSpPr>
-          <p:cNvPr id="15" name="Oval 14"/>
-          <p:cNvSpPr/>
-          <p:nvPr/>
-        </p:nvSpPr>
-        <p:spPr>
-          <a:xfrm>
-            <a:off x="7818120" y="356616"/>
-            <a:ext cx="41148" cy="41148"/>
-          </a:xfrm>
-          <a:prstGeom prst="ellipse">
-            <a:avLst/>
-          </a:prstGeom>
-          <a:solidFill>
-            <a:srgbClr val="3A5C9E"/>
-          </a:solidFill>
-          <a:ln>
-            <a:noFill/>
-          </a:ln>
-          <a:effectLst/>
-        </p:spPr>
-        <p:style>
-          <a:lnRef idx="1">
-            <a:schemeClr val="accent1"/>
-          </a:lnRef>
-          <a:fillRef idx="3">
-            <a:schemeClr val="accent1"/>
-          </a:fillRef>
-          <a:effectRef idx="2">
-            <a:schemeClr val="accent1"/>
-          </a:effectRef>
-          <a:fontRef idx="minor">
-            <a:schemeClr val="lt1"/>
-          </a:fontRef>
-        </p:style>
-        <p:txBody>
-          <a:bodyPr rtlCol="0" anchor="ctr"/>
-          <a:lstStyle/>
-          <a:p>
-            <a:pPr algn="ctr"/>
-          </a:p>
-        </p:txBody>
-      </p:sp>
-      <p:sp>
-        <p:nvSpPr>
-          <p:cNvPr id="16" name="Oval 15"/>
-          <p:cNvSpPr/>
-          <p:nvPr/>
-        </p:nvSpPr>
-        <p:spPr>
-          <a:xfrm>
-            <a:off x="7964424" y="356616"/>
-            <a:ext cx="41148" cy="41148"/>
-          </a:xfrm>
-          <a:prstGeom prst="ellipse">
-            <a:avLst/>
-          </a:prstGeom>
-          <a:solidFill>
-            <a:srgbClr val="3A5C9E"/>
-          </a:solidFill>
-          <a:ln>
-            <a:noFill/>
-          </a:ln>
-          <a:effectLst/>
-        </p:spPr>
-        <p:style>
-          <a:lnRef idx="1">
-            <a:schemeClr val="accent1"/>
-          </a:lnRef>
-          <a:fillRef idx="3">
-            <a:schemeClr val="accent1"/>
-          </a:fillRef>
-          <a:effectRef idx="2">
-            <a:schemeClr val="accent1"/>
-          </a:effectRef>
-          <a:fontRef idx="minor">
-            <a:schemeClr val="lt1"/>
-          </a:fontRef>
-        </p:style>
-        <p:txBody>
-          <a:bodyPr rtlCol="0" anchor="ctr"/>
-          <a:lstStyle/>
-          <a:p>
-            <a:pPr algn="ctr"/>
-          </a:p>
-        </p:txBody>
-      </p:sp>
-      <p:sp>
-        <p:nvSpPr>
-          <p:cNvPr id="17" name="Oval 16"/>
-          <p:cNvSpPr/>
-          <p:nvPr/>
-        </p:nvSpPr>
-        <p:spPr>
-          <a:xfrm>
-            <a:off x="8110728" y="356616"/>
-            <a:ext cx="41148" cy="41148"/>
-          </a:xfrm>
-          <a:prstGeom prst="ellipse">
-            <a:avLst/>
-          </a:prstGeom>
-          <a:solidFill>
-            <a:srgbClr val="3A5C9E"/>
-          </a:solidFill>
-          <a:ln>
-            <a:noFill/>
-          </a:ln>
-          <a:effectLst/>
-        </p:spPr>
-        <p:style>
-          <a:lnRef idx="1">
-            <a:schemeClr val="accent1"/>
-          </a:lnRef>
-          <a:fillRef idx="3">
-            <a:schemeClr val="accent1"/>
-          </a:fillRef>
-          <a:effectRef idx="2">
-            <a:schemeClr val="accent1"/>
-          </a:effectRef>
-          <a:fontRef idx="minor">
-            <a:schemeClr val="lt1"/>
-          </a:fontRef>
-        </p:style>
-        <p:txBody>
-          <a:bodyPr rtlCol="0" anchor="ctr"/>
-          <a:lstStyle/>
-          <a:p>
-            <a:pPr algn="ctr"/>
-          </a:p>
-        </p:txBody>
-      </p:sp>
-      <p:sp>
-        <p:nvSpPr>
-          <p:cNvPr id="18" name="Oval 17"/>
-          <p:cNvSpPr/>
-          <p:nvPr/>
-        </p:nvSpPr>
-        <p:spPr>
-          <a:xfrm>
-            <a:off x="8257032" y="356616"/>
-            <a:ext cx="41148" cy="41148"/>
-          </a:xfrm>
-          <a:prstGeom prst="ellipse">
-            <a:avLst/>
-          </a:prstGeom>
-          <a:solidFill>
-            <a:srgbClr val="3A5C9E"/>
-          </a:solidFill>
-          <a:ln>
-            <a:noFill/>
-          </a:ln>
-          <a:effectLst/>
-        </p:spPr>
-        <p:style>
-          <a:lnRef idx="1">
-            <a:schemeClr val="accent1"/>
-          </a:lnRef>
-          <a:fillRef idx="3">
-            <a:schemeClr val="accent1"/>
-          </a:fillRef>
-          <a:effectRef idx="2">
-            <a:schemeClr val="accent1"/>
-          </a:effectRef>
-          <a:fontRef idx="minor">
-            <a:schemeClr val="lt1"/>
-          </a:fontRef>
-        </p:style>
-        <p:txBody>
-          <a:bodyPr rtlCol="0" anchor="ctr"/>
-          <a:lstStyle/>
-          <a:p>
-            <a:pPr algn="ctr"/>
-          </a:p>
-        </p:txBody>
-      </p:sp>
-      <p:sp>
-        <p:nvSpPr>
-          <p:cNvPr id="19" name="Oval 18"/>
-          <p:cNvSpPr/>
-          <p:nvPr/>
-        </p:nvSpPr>
-        <p:spPr>
-          <a:xfrm>
-            <a:off x="8403336" y="356616"/>
-            <a:ext cx="41148" cy="41148"/>
-          </a:xfrm>
-          <a:prstGeom prst="ellipse">
-            <a:avLst/>
-          </a:prstGeom>
-          <a:solidFill>
-            <a:srgbClr val="3A5C9E"/>
-          </a:solidFill>
-          <a:ln>
-            <a:noFill/>
-          </a:ln>
-          <a:effectLst/>
-        </p:spPr>
-        <p:style>
-          <a:lnRef idx="1">
-            <a:schemeClr val="accent1"/>
-          </a:lnRef>
-          <a:fillRef idx="3">
-            <a:schemeClr val="accent1"/>
-          </a:fillRef>
-          <a:effectRef idx="2">
-            <a:schemeClr val="accent1"/>
-          </a:effectRef>
-          <a:fontRef idx="minor">
-            <a:schemeClr val="lt1"/>
-          </a:fontRef>
-        </p:style>
-        <p:txBody>
-          <a:bodyPr rtlCol="0" anchor="ctr"/>
-          <a:lstStyle/>
-          <a:p>
-            <a:pPr algn="ctr"/>
-          </a:p>
-        </p:txBody>
-      </p:sp>
-      <p:sp>
-        <p:nvSpPr>
-          <p:cNvPr id="20" name="Oval 19"/>
-          <p:cNvSpPr/>
-          <p:nvPr/>
-        </p:nvSpPr>
-        <p:spPr>
-          <a:xfrm>
-            <a:off x="8549640" y="356616"/>
-            <a:ext cx="41148" cy="41148"/>
-          </a:xfrm>
-          <a:prstGeom prst="ellipse">
-            <a:avLst/>
-          </a:prstGeom>
-          <a:solidFill>
-            <a:srgbClr val="3A5C9E"/>
-          </a:solidFill>
-          <a:ln>
-            <a:noFill/>
-          </a:ln>
-          <a:effectLst/>
-        </p:spPr>
-        <p:style>
-          <a:lnRef idx="1">
-            <a:schemeClr val="accent1"/>
-          </a:lnRef>
-          <a:fillRef idx="3">
-            <a:schemeClr val="accent1"/>
-          </a:fillRef>
-          <a:effectRef idx="2">
-            <a:schemeClr val="accent1"/>
-          </a:effectRef>
-          <a:fontRef idx="minor">
-            <a:schemeClr val="lt1"/>
-          </a:fontRef>
-        </p:style>
-        <p:txBody>
-          <a:bodyPr rtlCol="0" anchor="ctr"/>
-          <a:lstStyle/>
-          <a:p>
-            <a:pPr algn="ctr"/>
-          </a:p>
-        </p:txBody>
-      </p:sp>
-      <p:sp>
-        <p:nvSpPr>
-          <p:cNvPr id="21" name="Oval 20"/>
-          <p:cNvSpPr/>
-          <p:nvPr/>
-        </p:nvSpPr>
-        <p:spPr>
-          <a:xfrm>
-            <a:off x="7818120" y="512064"/>
-            <a:ext cx="41148" cy="41148"/>
-          </a:xfrm>
-          <a:prstGeom prst="ellipse">
-            <a:avLst/>
-          </a:prstGeom>
-          <a:solidFill>
-            <a:srgbClr val="3A5C9E"/>
-          </a:solidFill>
-          <a:ln>
-            <a:noFill/>
-          </a:ln>
-          <a:effectLst/>
-        </p:spPr>
-        <p:style>
-          <a:lnRef idx="1">
-            <a:schemeClr val="accent1"/>
-          </a:lnRef>
-          <a:fillRef idx="3">
-            <a:schemeClr val="accent1"/>
-          </a:fillRef>
-          <a:effectRef idx="2">
-            <a:schemeClr val="accent1"/>
-          </a:effectRef>
-          <a:fontRef idx="minor">
-            <a:schemeClr val="lt1"/>
-          </a:fontRef>
-        </p:style>
-        <p:txBody>
-          <a:bodyPr rtlCol="0" anchor="ctr"/>
-          <a:lstStyle/>
-          <a:p>
-            <a:pPr algn="ctr"/>
-          </a:p>
-        </p:txBody>
-      </p:sp>
-      <p:sp>
-        <p:nvSpPr>
-          <p:cNvPr id="22" name="Oval 21"/>
-          <p:cNvSpPr/>
-          <p:nvPr/>
-        </p:nvSpPr>
-        <p:spPr>
-          <a:xfrm>
-            <a:off x="7964424" y="512064"/>
-            <a:ext cx="41148" cy="41148"/>
-          </a:xfrm>
-          <a:prstGeom prst="ellipse">
-            <a:avLst/>
-          </a:prstGeom>
-          <a:solidFill>
-            <a:srgbClr val="3A5C9E"/>
-          </a:solidFill>
-          <a:ln>
-            <a:noFill/>
-          </a:ln>
-          <a:effectLst/>
-        </p:spPr>
-        <p:style>
-          <a:lnRef idx="1">
-            <a:schemeClr val="accent1"/>
-          </a:lnRef>
-          <a:fillRef idx="3">
-            <a:schemeClr val="accent1"/>
-          </a:fillRef>
-          <a:effectRef idx="2">
-            <a:schemeClr val="accent1"/>
-          </a:effectRef>
-          <a:fontRef idx="minor">
-            <a:schemeClr val="lt1"/>
-          </a:fontRef>
-        </p:style>
-        <p:txBody>
-          <a:bodyPr rtlCol="0" anchor="ctr"/>
-          <a:lstStyle/>
-          <a:p>
-            <a:pPr algn="ctr"/>
-          </a:p>
-        </p:txBody>
-      </p:sp>
-      <p:sp>
-        <p:nvSpPr>
-          <p:cNvPr id="23" name="Oval 22"/>
-          <p:cNvSpPr/>
-          <p:nvPr/>
-        </p:nvSpPr>
-        <p:spPr>
-          <a:xfrm>
-            <a:off x="8110728" y="512064"/>
-            <a:ext cx="41148" cy="41148"/>
-          </a:xfrm>
-          <a:prstGeom prst="ellipse">
-            <a:avLst/>
-          </a:prstGeom>
-          <a:solidFill>
-            <a:srgbClr val="3A5C9E"/>
-          </a:solidFill>
-          <a:ln>
-            <a:noFill/>
-          </a:ln>
-          <a:effectLst/>
-        </p:spPr>
-        <p:style>
-          <a:lnRef idx="1">
-            <a:schemeClr val="accent1"/>
-          </a:lnRef>
-          <a:fillRef idx="3">
-            <a:schemeClr val="accent1"/>
-          </a:fillRef>
-          <a:effectRef idx="2">
-            <a:schemeClr val="accent1"/>
-          </a:effectRef>
-          <a:fontRef idx="minor">
-            <a:schemeClr val="lt1"/>
-          </a:fontRef>
-        </p:style>
-        <p:txBody>
-          <a:bodyPr rtlCol="0" anchor="ctr"/>
-          <a:lstStyle/>
-          <a:p>
-            <a:pPr algn="ctr"/>
-          </a:p>
-        </p:txBody>
-      </p:sp>
-      <p:sp>
-        <p:nvSpPr>
-          <p:cNvPr id="24" name="Oval 23"/>
-          <p:cNvSpPr/>
-          <p:nvPr/>
-        </p:nvSpPr>
-        <p:spPr>
-          <a:xfrm>
-            <a:off x="8257032" y="512064"/>
-            <a:ext cx="41148" cy="41148"/>
-          </a:xfrm>
-          <a:prstGeom prst="ellipse">
-            <a:avLst/>
-          </a:prstGeom>
-          <a:solidFill>
-            <a:srgbClr val="3A5C9E"/>
-          </a:solidFill>
-          <a:ln>
-            <a:noFill/>
-          </a:ln>
-          <a:effectLst/>
-        </p:spPr>
-        <p:style>
-          <a:lnRef idx="1">
-            <a:schemeClr val="accent1"/>
-          </a:lnRef>
-          <a:fillRef idx="3">
-            <a:schemeClr val="accent1"/>
-          </a:fillRef>
-          <a:effectRef idx="2">
-            <a:schemeClr val="accent1"/>
-          </a:effectRef>
-          <a:fontRef idx="minor">
-            <a:schemeClr val="lt1"/>
-          </a:fontRef>
-        </p:style>
-        <p:txBody>
-          <a:bodyPr rtlCol="0" anchor="ctr"/>
-          <a:lstStyle/>
-          <a:p>
-            <a:pPr algn="ctr"/>
-          </a:p>
-        </p:txBody>
-      </p:sp>
-      <p:sp>
-        <p:nvSpPr>
-          <p:cNvPr id="25" name="Oval 24"/>
-          <p:cNvSpPr/>
-          <p:nvPr/>
-        </p:nvSpPr>
-        <p:spPr>
-          <a:xfrm>
-            <a:off x="8403336" y="512064"/>
-            <a:ext cx="41148" cy="41148"/>
-          </a:xfrm>
-          <a:prstGeom prst="ellipse">
-            <a:avLst/>
-          </a:prstGeom>
-          <a:solidFill>
-            <a:srgbClr val="3A5C9E"/>
-          </a:solidFill>
-          <a:ln>
-            <a:noFill/>
-          </a:ln>
-          <a:effectLst/>
-        </p:spPr>
-        <p:style>
-          <a:lnRef idx="1">
-            <a:schemeClr val="accent1"/>
-          </a:lnRef>
-          <a:fillRef idx="3">
-            <a:schemeClr val="accent1"/>
-          </a:fillRef>
-          <a:effectRef idx="2">
-            <a:schemeClr val="accent1"/>
-          </a:effectRef>
-          <a:fontRef idx="minor">
-            <a:schemeClr val="lt1"/>
-          </a:fontRef>
-        </p:style>
-        <p:txBody>
-          <a:bodyPr rtlCol="0" anchor="ctr"/>
-          <a:lstStyle/>
-          <a:p>
-            <a:pPr algn="ctr"/>
-          </a:p>
-        </p:txBody>
-      </p:sp>
-      <p:sp>
-        <p:nvSpPr>
-          <p:cNvPr id="26" name="Oval 25"/>
-          <p:cNvSpPr/>
-          <p:nvPr/>
-        </p:nvSpPr>
-        <p:spPr>
-          <a:xfrm>
-            <a:off x="8549640" y="512064"/>
-            <a:ext cx="41148" cy="41148"/>
-          </a:xfrm>
-          <a:prstGeom prst="ellipse">
-            <a:avLst/>
-          </a:prstGeom>
-          <a:solidFill>
-            <a:srgbClr val="3A5C9E"/>
-          </a:solidFill>
-          <a:ln>
-            <a:noFill/>
-          </a:ln>
-          <a:effectLst/>
-        </p:spPr>
-        <p:style>
-          <a:lnRef idx="1">
-            <a:schemeClr val="accent1"/>
-          </a:lnRef>
-          <a:fillRef idx="3">
-            <a:schemeClr val="accent1"/>
-          </a:fillRef>
-          <a:effectRef idx="2">
-            <a:schemeClr val="accent1"/>
-          </a:effectRef>
-          <a:fontRef idx="minor">
-            <a:schemeClr val="lt1"/>
-          </a:fontRef>
-        </p:style>
-        <p:txBody>
-          <a:bodyPr rtlCol="0" anchor="ctr"/>
-          <a:lstStyle/>
-          <a:p>
-            <a:pPr algn="ctr"/>
-          </a:p>
-        </p:txBody>
-      </p:sp>
-      <p:sp>
-        <p:nvSpPr>
-          <p:cNvPr id="27" name="Rectangle 26"/>
-          <p:cNvSpPr/>
-          <p:nvPr/>
-        </p:nvSpPr>
-        <p:spPr>
-          <a:xfrm>
-            <a:off x="0" y="836676"/>
-            <a:ext cx="9144000" cy="27432"/>
-          </a:xfrm>
-          <a:prstGeom prst="rect">
-            <a:avLst/>
-          </a:prstGeom>
-          <a:solidFill>
-            <a:srgbClr val="246BFF"/>
-          </a:solidFill>
-          <a:ln>
-            <a:noFill/>
-          </a:ln>
-          <a:effectLst/>
-        </p:spPr>
-        <p:style>
-          <a:lnRef idx="1">
-            <a:schemeClr val="accent1"/>
-          </a:lnRef>
-          <a:fillRef idx="3">
-            <a:schemeClr val="accent1"/>
-          </a:fillRef>
-          <a:effectRef idx="2">
-            <a:schemeClr val="accent1"/>
-          </a:effectRef>
-          <a:fontRef idx="minor">
-            <a:schemeClr val="lt1"/>
-          </a:fontRef>
-        </p:style>
-        <p:txBody>
-          <a:bodyPr rtlCol="0" anchor="ctr"/>
-          <a:lstStyle/>
-          <a:p>
-            <a:pPr algn="ctr"/>
-          </a:p>
-        </p:txBody>
-      </p:sp>
-      <p:sp>
-        <p:nvSpPr>
-          <p:cNvPr id="28" name="Rounded Rectangle 27"/>
-          <p:cNvSpPr/>
-          <p:nvPr/>
-        </p:nvSpPr>
-        <p:spPr>
-          <a:xfrm>
-            <a:off x="502920" y="1097280"/>
-            <a:ext cx="1938528" cy="1371600"/>
-          </a:xfrm>
-          <a:prstGeom prst="roundRect">
-            <a:avLst>
-              <a:gd name="adj" fmla="val 5000"/>
-            </a:avLst>
-          </a:prstGeom>
-          <a:solidFill>
-            <a:srgbClr val="FFFFFF"/>
-          </a:solidFill>
-          <a:ln w="9525">
-            <a:solidFill>
-              <a:srgbClr val="E2E8F3"/>
-            </a:solidFill>
-          </a:ln>
-          <a:effectLst>
-            <a:outerShdw blurRad="80000" dist="30000" dir="5400000" rotWithShape="0">
-              <a:srgbClr val="17244A">
-                <a:alpha val="70000"/>
-              </a:srgbClr>
-            </a:outerShdw>
-          </a:effectLst>
-        </p:spPr>
-        <p:style>
-          <a:lnRef idx="1">
-            <a:schemeClr val="accent1"/>
-          </a:lnRef>
-          <a:fillRef idx="3">
-            <a:schemeClr val="accent1"/>
-          </a:fillRef>
-          <a:effectRef idx="2">
-            <a:schemeClr val="accent1"/>
-          </a:effectRef>
-          <a:fontRef idx="minor">
-            <a:schemeClr val="lt1"/>
-          </a:fontRef>
-        </p:style>
-        <p:txBody>
-          <a:bodyPr rtlCol="0" anchor="ctr"/>
-          <a:lstStyle/>
-          <a:p>
-            <a:pPr algn="ctr"/>
-          </a:p>
-        </p:txBody>
-      </p:sp>
-      <p:sp>
-        <p:nvSpPr>
-          <p:cNvPr id="29" name="Rectangle 28"/>
-          <p:cNvSpPr/>
-          <p:nvPr/>
-        </p:nvSpPr>
-        <p:spPr>
-          <a:xfrm>
-            <a:off x="612648" y="1097280"/>
-            <a:ext cx="1719072" cy="45720"/>
-          </a:xfrm>
-          <a:prstGeom prst="rect">
-            <a:avLst/>
-          </a:prstGeom>
-          <a:solidFill>
-            <a:srgbClr val="246BFF"/>
-          </a:solidFill>
-          <a:ln>
-            <a:noFill/>
-          </a:ln>
-          <a:effectLst/>
-        </p:spPr>
-        <p:style>
-          <a:lnRef idx="1">
-            <a:schemeClr val="accent1"/>
-          </a:lnRef>
-          <a:fillRef idx="3">
-            <a:schemeClr val="accent1"/>
-          </a:fillRef>
-          <a:effectRef idx="2">
-            <a:schemeClr val="accent1"/>
-          </a:effectRef>
-          <a:fontRef idx="minor">
-            <a:schemeClr val="lt1"/>
-          </a:fontRef>
-        </p:style>
-        <p:txBody>
-          <a:bodyPr rtlCol="0" anchor="ctr"/>
-          <a:lstStyle/>
-          <a:p>
-            <a:pPr algn="ctr"/>
-          </a:p>
-        </p:txBody>
-      </p:sp>
-      <p:sp>
-        <p:nvSpPr>
-          <p:cNvPr id="30" name="Oval 29"/>
-          <p:cNvSpPr/>
-          <p:nvPr/>
-        </p:nvSpPr>
-        <p:spPr>
-          <a:xfrm>
-            <a:off x="1216152" y="1225296"/>
-            <a:ext cx="512064" cy="512064"/>
-          </a:xfrm>
-          <a:prstGeom prst="ellipse">
-            <a:avLst/>
-          </a:prstGeom>
-          <a:gradFill>
-            <a:gsLst>
-              <a:gs pos="0">
-                <a:srgbClr val="246BFF"/>
-              </a:gs>
-              <a:gs pos="100000">
-                <a:srgbClr val="5A1BDF"/>
-              </a:gs>
-            </a:gsLst>
-            <a:lin ang="2700000" scaled="1"/>
-          </a:gradFill>
+            <a:srgbClr val="0B1024"/>
+          </a:solidFill>
           <a:ln>
             <a:noFill/>
           </a:ln>
@@ -5448,7 +4181,7 @@
       </p:sp>
       <p:pic>
         <p:nvPicPr>
-          <p:cNvPr id="31" name="Picture 30" descr="w-8-3.png"/>
+          <p:cNvPr id="3" name="Picture 2" descr="hub.png"/>
           <p:cNvPicPr>
             <a:picLocks noChangeAspect="1"/>
           </p:cNvPicPr>
@@ -5462,8 +4195,8 @@
         </p:blipFill>
         <p:spPr>
           <a:xfrm>
-            <a:off x="1339047" y="1348191"/>
-            <a:ext cx="266273" cy="266273"/>
+            <a:off x="0" y="0"/>
+            <a:ext cx="9144000" cy="5143500"/>
           </a:xfrm>
           <a:prstGeom prst="rect">
             <a:avLst/>
@@ -5472,1768 +4205,14 @@
       </p:pic>
       <p:sp>
         <p:nvSpPr>
-          <p:cNvPr id="32" name="TextBox 31"/>
+          <p:cNvPr id="4" name="TextBox 3"/>
           <p:cNvSpPr txBox="1"/>
           <p:nvPr/>
         </p:nvSpPr>
         <p:spPr>
           <a:xfrm>
-            <a:off x="594360" y="1874519"/>
-            <a:ext cx="1755648" cy="320040"/>
-          </a:xfrm>
-          <a:prstGeom prst="rect">
-            <a:avLst/>
-          </a:prstGeom>
-          <a:noFill/>
-        </p:spPr>
-        <p:txBody>
-          <a:bodyPr wrap="square" anchor="t" lIns="27432" rIns="27432" tIns="9144" bIns="9144">
-            <a:spAutoFit/>
-          </a:bodyPr>
-          <a:lstStyle/>
-          <a:p>
-            <a:pPr algn="ctr">
-              <a:lnSpc>
-                <a:spcPct val="100000"/>
-              </a:lnSpc>
-              <a:spcBef>
-                <a:spcPts val="0"/>
-              </a:spcBef>
-              <a:spcAft>
-                <a:spcPts val="200"/>
-              </a:spcAft>
-            </a:pPr>
-            <a:r>
-              <a:rPr sz="1150" b="1" i="0">
-                <a:solidFill>
-                  <a:srgbClr val="0A1A3D"/>
-                </a:solidFill>
-                <a:latin typeface="微软雅黑"/>
-                <a:ea typeface="微软雅黑"/>
-                <a:cs typeface="微软雅黑"/>
-              </a:rPr>
-              <a:t>造型设计</a:t>
-            </a:r>
-          </a:p>
-        </p:txBody>
-      </p:sp>
-      <p:sp>
-        <p:nvSpPr>
-          <p:cNvPr id="33" name="TextBox 32"/>
-          <p:cNvSpPr txBox="1"/>
-          <p:nvPr/>
-        </p:nvSpPr>
-        <p:spPr>
-          <a:xfrm>
-            <a:off x="594360" y="2194560"/>
-            <a:ext cx="1755648" cy="274320"/>
-          </a:xfrm>
-          <a:prstGeom prst="rect">
-            <a:avLst/>
-          </a:prstGeom>
-          <a:noFill/>
-        </p:spPr>
-        <p:txBody>
-          <a:bodyPr wrap="square" anchor="t" lIns="27432" rIns="27432" tIns="9144" bIns="9144">
-            <a:spAutoFit/>
-          </a:bodyPr>
-          <a:lstStyle/>
-          <a:p>
-            <a:pPr algn="ctr">
-              <a:lnSpc>
-                <a:spcPct val="110000"/>
-              </a:lnSpc>
-              <a:spcBef>
-                <a:spcPts val="0"/>
-              </a:spcBef>
-              <a:spcAft>
-                <a:spcPts val="200"/>
-              </a:spcAft>
-            </a:pPr>
-            <a:r>
-              <a:rPr sz="750" b="0" i="0">
-                <a:solidFill>
-                  <a:srgbClr val="5B6782"/>
-                </a:solidFill>
-                <a:latin typeface="微软雅黑"/>
-                <a:ea typeface="微软雅黑"/>
-                <a:cs typeface="微软雅黑"/>
-              </a:rPr>
-              <a:t>前瞻·内外造型·CMF·CAS</a:t>
-            </a:r>
-          </a:p>
-        </p:txBody>
-      </p:sp>
-      <p:sp>
-        <p:nvSpPr>
-          <p:cNvPr id="34" name="Rounded Rectangle 33"/>
-          <p:cNvSpPr/>
-          <p:nvPr/>
-        </p:nvSpPr>
-        <p:spPr>
-          <a:xfrm>
-            <a:off x="2587752" y="1097280"/>
-            <a:ext cx="1938528" cy="1371600"/>
-          </a:xfrm>
-          <a:prstGeom prst="roundRect">
-            <a:avLst>
-              <a:gd name="adj" fmla="val 5000"/>
-            </a:avLst>
-          </a:prstGeom>
-          <a:solidFill>
-            <a:srgbClr val="FFFFFF"/>
-          </a:solidFill>
-          <a:ln w="9525">
-            <a:solidFill>
-              <a:srgbClr val="E2E8F3"/>
-            </a:solidFill>
-          </a:ln>
-          <a:effectLst>
-            <a:outerShdw blurRad="80000" dist="30000" dir="5400000" rotWithShape="0">
-              <a:srgbClr val="17244A">
-                <a:alpha val="70000"/>
-              </a:srgbClr>
-            </a:outerShdw>
-          </a:effectLst>
-        </p:spPr>
-        <p:style>
-          <a:lnRef idx="1">
-            <a:schemeClr val="accent1"/>
-          </a:lnRef>
-          <a:fillRef idx="3">
-            <a:schemeClr val="accent1"/>
-          </a:fillRef>
-          <a:effectRef idx="2">
-            <a:schemeClr val="accent1"/>
-          </a:effectRef>
-          <a:fontRef idx="minor">
-            <a:schemeClr val="lt1"/>
-          </a:fontRef>
-        </p:style>
-        <p:txBody>
-          <a:bodyPr rtlCol="0" anchor="ctr"/>
-          <a:lstStyle/>
-          <a:p>
-            <a:pPr algn="ctr"/>
-          </a:p>
-        </p:txBody>
-      </p:sp>
-      <p:sp>
-        <p:nvSpPr>
-          <p:cNvPr id="35" name="Rectangle 34"/>
-          <p:cNvSpPr/>
-          <p:nvPr/>
-        </p:nvSpPr>
-        <p:spPr>
-          <a:xfrm>
-            <a:off x="2697480" y="1097280"/>
-            <a:ext cx="1719072" cy="45720"/>
-          </a:xfrm>
-          <a:prstGeom prst="rect">
-            <a:avLst/>
-          </a:prstGeom>
-          <a:solidFill>
-            <a:srgbClr val="00B5E3"/>
-          </a:solidFill>
-          <a:ln>
-            <a:noFill/>
-          </a:ln>
-          <a:effectLst/>
-        </p:spPr>
-        <p:style>
-          <a:lnRef idx="1">
-            <a:schemeClr val="accent1"/>
-          </a:lnRef>
-          <a:fillRef idx="3">
-            <a:schemeClr val="accent1"/>
-          </a:fillRef>
-          <a:effectRef idx="2">
-            <a:schemeClr val="accent1"/>
-          </a:effectRef>
-          <a:fontRef idx="minor">
-            <a:schemeClr val="lt1"/>
-          </a:fontRef>
-        </p:style>
-        <p:txBody>
-          <a:bodyPr rtlCol="0" anchor="ctr"/>
-          <a:lstStyle/>
-          <a:p>
-            <a:pPr algn="ctr"/>
-          </a:p>
-        </p:txBody>
-      </p:sp>
-      <p:sp>
-        <p:nvSpPr>
-          <p:cNvPr id="36" name="Oval 35"/>
-          <p:cNvSpPr/>
-          <p:nvPr/>
-        </p:nvSpPr>
-        <p:spPr>
-          <a:xfrm>
-            <a:off x="3300984" y="1225296"/>
-            <a:ext cx="512064" cy="512064"/>
-          </a:xfrm>
-          <a:prstGeom prst="ellipse">
-            <a:avLst/>
-          </a:prstGeom>
-          <a:gradFill>
-            <a:gsLst>
-              <a:gs pos="0">
-                <a:srgbClr val="00B5E3"/>
-              </a:gs>
-              <a:gs pos="100000">
-                <a:srgbClr val="5A1BDF"/>
-              </a:gs>
-            </a:gsLst>
-            <a:lin ang="2700000" scaled="1"/>
-          </a:gradFill>
-          <a:ln>
-            <a:noFill/>
-          </a:ln>
-          <a:effectLst/>
-        </p:spPr>
-        <p:style>
-          <a:lnRef idx="1">
-            <a:schemeClr val="accent1"/>
-          </a:lnRef>
-          <a:fillRef idx="3">
-            <a:schemeClr val="accent1"/>
-          </a:fillRef>
-          <a:effectRef idx="2">
-            <a:schemeClr val="accent1"/>
-          </a:effectRef>
-          <a:fontRef idx="minor">
-            <a:schemeClr val="lt1"/>
-          </a:fontRef>
-        </p:style>
-        <p:txBody>
-          <a:bodyPr rtlCol="0" anchor="ctr"/>
-          <a:lstStyle/>
-          <a:p>
-            <a:pPr algn="ctr"/>
-          </a:p>
-        </p:txBody>
-      </p:sp>
-      <p:pic>
-        <p:nvPicPr>
-          <p:cNvPr id="37" name="Picture 36" descr="w-8-5.png"/>
-          <p:cNvPicPr>
-            <a:picLocks noChangeAspect="1"/>
-          </p:cNvPicPr>
-          <p:nvPr/>
-        </p:nvPicPr>
-        <p:blipFill>
-          <a:blip r:embed="rId3"/>
-          <a:stretch>
-            <a:fillRect/>
-          </a:stretch>
-        </p:blipFill>
-        <p:spPr>
-          <a:xfrm>
-            <a:off x="3423879" y="1348191"/>
-            <a:ext cx="266273" cy="266273"/>
-          </a:xfrm>
-          <a:prstGeom prst="rect">
-            <a:avLst/>
-          </a:prstGeom>
-        </p:spPr>
-      </p:pic>
-      <p:sp>
-        <p:nvSpPr>
-          <p:cNvPr id="38" name="TextBox 37"/>
-          <p:cNvSpPr txBox="1"/>
-          <p:nvPr/>
-        </p:nvSpPr>
-        <p:spPr>
-          <a:xfrm>
-            <a:off x="2679192" y="1874519"/>
-            <a:ext cx="1755648" cy="320040"/>
-          </a:xfrm>
-          <a:prstGeom prst="rect">
-            <a:avLst/>
-          </a:prstGeom>
-          <a:noFill/>
-        </p:spPr>
-        <p:txBody>
-          <a:bodyPr wrap="square" anchor="t" lIns="27432" rIns="27432" tIns="9144" bIns="9144">
-            <a:spAutoFit/>
-          </a:bodyPr>
-          <a:lstStyle/>
-          <a:p>
-            <a:pPr algn="ctr">
-              <a:lnSpc>
-                <a:spcPct val="100000"/>
-              </a:lnSpc>
-              <a:spcBef>
-                <a:spcPts val="0"/>
-              </a:spcBef>
-              <a:spcAft>
-                <a:spcPts val="200"/>
-              </a:spcAft>
-            </a:pPr>
-            <a:r>
-              <a:rPr sz="1150" b="1" i="0">
-                <a:solidFill>
-                  <a:srgbClr val="0A1A3D"/>
-                </a:solidFill>
-                <a:latin typeface="微软雅黑"/>
-                <a:ea typeface="微软雅黑"/>
-                <a:cs typeface="微软雅黑"/>
-              </a:rPr>
-              <a:t>交互系统开发</a:t>
-            </a:r>
-          </a:p>
-        </p:txBody>
-      </p:sp>
-      <p:sp>
-        <p:nvSpPr>
-          <p:cNvPr id="39" name="TextBox 38"/>
-          <p:cNvSpPr txBox="1"/>
-          <p:nvPr/>
-        </p:nvSpPr>
-        <p:spPr>
-          <a:xfrm>
-            <a:off x="2679192" y="2194560"/>
-            <a:ext cx="1755648" cy="274320"/>
-          </a:xfrm>
-          <a:prstGeom prst="rect">
-            <a:avLst/>
-          </a:prstGeom>
-          <a:noFill/>
-        </p:spPr>
-        <p:txBody>
-          <a:bodyPr wrap="square" anchor="t" lIns="27432" rIns="27432" tIns="9144" bIns="9144">
-            <a:spAutoFit/>
-          </a:bodyPr>
-          <a:lstStyle/>
-          <a:p>
-            <a:pPr algn="ctr">
-              <a:lnSpc>
-                <a:spcPct val="110000"/>
-              </a:lnSpc>
-              <a:spcBef>
-                <a:spcPts val="0"/>
-              </a:spcBef>
-              <a:spcAft>
-                <a:spcPts val="200"/>
-              </a:spcAft>
-            </a:pPr>
-            <a:r>
-              <a:rPr sz="750" b="0" i="0">
-                <a:solidFill>
-                  <a:srgbClr val="5B6782"/>
-                </a:solidFill>
-                <a:latin typeface="微软雅黑"/>
-                <a:ea typeface="微软雅黑"/>
-                <a:cs typeface="微软雅黑"/>
-              </a:rPr>
-              <a:t>UI/UX·动效·VR 内容</a:t>
-            </a:r>
-          </a:p>
-        </p:txBody>
-      </p:sp>
-      <p:sp>
-        <p:nvSpPr>
-          <p:cNvPr id="40" name="Rounded Rectangle 39"/>
-          <p:cNvSpPr/>
-          <p:nvPr/>
-        </p:nvSpPr>
-        <p:spPr>
-          <a:xfrm>
-            <a:off x="4672584" y="1097280"/>
-            <a:ext cx="1938528" cy="1371600"/>
-          </a:xfrm>
-          <a:prstGeom prst="roundRect">
-            <a:avLst>
-              <a:gd name="adj" fmla="val 5000"/>
-            </a:avLst>
-          </a:prstGeom>
-          <a:solidFill>
-            <a:srgbClr val="FFFFFF"/>
-          </a:solidFill>
-          <a:ln w="9525">
-            <a:solidFill>
-              <a:srgbClr val="E2E8F3"/>
-            </a:solidFill>
-          </a:ln>
-          <a:effectLst>
-            <a:outerShdw blurRad="80000" dist="30000" dir="5400000" rotWithShape="0">
-              <a:srgbClr val="17244A">
-                <a:alpha val="70000"/>
-              </a:srgbClr>
-            </a:outerShdw>
-          </a:effectLst>
-        </p:spPr>
-        <p:style>
-          <a:lnRef idx="1">
-            <a:schemeClr val="accent1"/>
-          </a:lnRef>
-          <a:fillRef idx="3">
-            <a:schemeClr val="accent1"/>
-          </a:fillRef>
-          <a:effectRef idx="2">
-            <a:schemeClr val="accent1"/>
-          </a:effectRef>
-          <a:fontRef idx="minor">
-            <a:schemeClr val="lt1"/>
-          </a:fontRef>
-        </p:style>
-        <p:txBody>
-          <a:bodyPr rtlCol="0" anchor="ctr"/>
-          <a:lstStyle/>
-          <a:p>
-            <a:pPr algn="ctr"/>
-          </a:p>
-        </p:txBody>
-      </p:sp>
-      <p:sp>
-        <p:nvSpPr>
-          <p:cNvPr id="41" name="Rectangle 40"/>
-          <p:cNvSpPr/>
-          <p:nvPr/>
-        </p:nvSpPr>
-        <p:spPr>
-          <a:xfrm>
-            <a:off x="4782312" y="1097280"/>
-            <a:ext cx="1719072" cy="45720"/>
-          </a:xfrm>
-          <a:prstGeom prst="rect">
-            <a:avLst/>
-          </a:prstGeom>
-          <a:solidFill>
-            <a:srgbClr val="5A1BDF"/>
-          </a:solidFill>
-          <a:ln>
-            <a:noFill/>
-          </a:ln>
-          <a:effectLst/>
-        </p:spPr>
-        <p:style>
-          <a:lnRef idx="1">
-            <a:schemeClr val="accent1"/>
-          </a:lnRef>
-          <a:fillRef idx="3">
-            <a:schemeClr val="accent1"/>
-          </a:fillRef>
-          <a:effectRef idx="2">
-            <a:schemeClr val="accent1"/>
-          </a:effectRef>
-          <a:fontRef idx="minor">
-            <a:schemeClr val="lt1"/>
-          </a:fontRef>
-        </p:style>
-        <p:txBody>
-          <a:bodyPr rtlCol="0" anchor="ctr"/>
-          <a:lstStyle/>
-          <a:p>
-            <a:pPr algn="ctr"/>
-          </a:p>
-        </p:txBody>
-      </p:sp>
-      <p:sp>
-        <p:nvSpPr>
-          <p:cNvPr id="42" name="Oval 41"/>
-          <p:cNvSpPr/>
-          <p:nvPr/>
-        </p:nvSpPr>
-        <p:spPr>
-          <a:xfrm>
-            <a:off x="5385816" y="1225296"/>
-            <a:ext cx="512064" cy="512064"/>
-          </a:xfrm>
-          <a:prstGeom prst="ellipse">
-            <a:avLst/>
-          </a:prstGeom>
-          <a:gradFill>
-            <a:gsLst>
-              <a:gs pos="0">
-                <a:srgbClr val="5A1BDF"/>
-              </a:gs>
-              <a:gs pos="100000">
-                <a:srgbClr val="5A1BDF"/>
-              </a:gs>
-            </a:gsLst>
-            <a:lin ang="2700000" scaled="1"/>
-          </a:gradFill>
-          <a:ln>
-            <a:noFill/>
-          </a:ln>
-          <a:effectLst/>
-        </p:spPr>
-        <p:style>
-          <a:lnRef idx="1">
-            <a:schemeClr val="accent1"/>
-          </a:lnRef>
-          <a:fillRef idx="3">
-            <a:schemeClr val="accent1"/>
-          </a:fillRef>
-          <a:effectRef idx="2">
-            <a:schemeClr val="accent1"/>
-          </a:effectRef>
-          <a:fontRef idx="minor">
-            <a:schemeClr val="lt1"/>
-          </a:fontRef>
-        </p:style>
-        <p:txBody>
-          <a:bodyPr rtlCol="0" anchor="ctr"/>
-          <a:lstStyle/>
-          <a:p>
-            <a:pPr algn="ctr"/>
-          </a:p>
-        </p:txBody>
-      </p:sp>
-      <p:pic>
-        <p:nvPicPr>
-          <p:cNvPr id="43" name="Picture 42" descr="w-13-4.png"/>
-          <p:cNvPicPr>
-            <a:picLocks noChangeAspect="1"/>
-          </p:cNvPicPr>
-          <p:nvPr/>
-        </p:nvPicPr>
-        <p:blipFill>
-          <a:blip r:embed="rId4"/>
-          <a:stretch>
-            <a:fillRect/>
-          </a:stretch>
-        </p:blipFill>
-        <p:spPr>
-          <a:xfrm>
-            <a:off x="5508711" y="1348191"/>
-            <a:ext cx="266273" cy="266273"/>
-          </a:xfrm>
-          <a:prstGeom prst="rect">
-            <a:avLst/>
-          </a:prstGeom>
-        </p:spPr>
-      </p:pic>
-      <p:sp>
-        <p:nvSpPr>
-          <p:cNvPr id="44" name="TextBox 43"/>
-          <p:cNvSpPr txBox="1"/>
-          <p:nvPr/>
-        </p:nvSpPr>
-        <p:spPr>
-          <a:xfrm>
-            <a:off x="4764024" y="1874519"/>
-            <a:ext cx="1755648" cy="320040"/>
-          </a:xfrm>
-          <a:prstGeom prst="rect">
-            <a:avLst/>
-          </a:prstGeom>
-          <a:noFill/>
-        </p:spPr>
-        <p:txBody>
-          <a:bodyPr wrap="square" anchor="t" lIns="27432" rIns="27432" tIns="9144" bIns="9144">
-            <a:spAutoFit/>
-          </a:bodyPr>
-          <a:lstStyle/>
-          <a:p>
-            <a:pPr algn="ctr">
-              <a:lnSpc>
-                <a:spcPct val="100000"/>
-              </a:lnSpc>
-              <a:spcBef>
-                <a:spcPts val="0"/>
-              </a:spcBef>
-              <a:spcAft>
-                <a:spcPts val="200"/>
-              </a:spcAft>
-            </a:pPr>
-            <a:r>
-              <a:rPr sz="1150" b="1" i="0">
-                <a:solidFill>
-                  <a:srgbClr val="0A1A3D"/>
-                </a:solidFill>
-                <a:latin typeface="微软雅黑"/>
-                <a:ea typeface="微软雅黑"/>
-                <a:cs typeface="微软雅黑"/>
-              </a:rPr>
-              <a:t>软硬件开发</a:t>
-            </a:r>
-          </a:p>
-        </p:txBody>
-      </p:sp>
-      <p:sp>
-        <p:nvSpPr>
-          <p:cNvPr id="45" name="TextBox 44"/>
-          <p:cNvSpPr txBox="1"/>
-          <p:nvPr/>
-        </p:nvSpPr>
-        <p:spPr>
-          <a:xfrm>
-            <a:off x="4764024" y="2194560"/>
-            <a:ext cx="1755648" cy="274320"/>
-          </a:xfrm>
-          <a:prstGeom prst="rect">
-            <a:avLst/>
-          </a:prstGeom>
-          <a:noFill/>
-        </p:spPr>
-        <p:txBody>
-          <a:bodyPr wrap="square" anchor="t" lIns="27432" rIns="27432" tIns="9144" bIns="9144">
-            <a:spAutoFit/>
-          </a:bodyPr>
-          <a:lstStyle/>
-          <a:p>
-            <a:pPr algn="ctr">
-              <a:lnSpc>
-                <a:spcPct val="110000"/>
-              </a:lnSpc>
-              <a:spcBef>
-                <a:spcPts val="0"/>
-              </a:spcBef>
-              <a:spcAft>
-                <a:spcPts val="200"/>
-              </a:spcAft>
-            </a:pPr>
-            <a:r>
-              <a:rPr sz="750" b="0" i="0">
-                <a:solidFill>
-                  <a:srgbClr val="5B6782"/>
-                </a:solidFill>
-                <a:latin typeface="微软雅黑"/>
-                <a:ea typeface="微软雅黑"/>
-                <a:cs typeface="微软雅黑"/>
-              </a:rPr>
-              <a:t>座舱系统·嵌入式·测试</a:t>
-            </a:r>
-          </a:p>
-        </p:txBody>
-      </p:sp>
-      <p:sp>
-        <p:nvSpPr>
-          <p:cNvPr id="46" name="Rounded Rectangle 45"/>
-          <p:cNvSpPr/>
-          <p:nvPr/>
-        </p:nvSpPr>
-        <p:spPr>
-          <a:xfrm>
-            <a:off x="6757416" y="1097280"/>
-            <a:ext cx="1938528" cy="1371600"/>
-          </a:xfrm>
-          <a:prstGeom prst="roundRect">
-            <a:avLst>
-              <a:gd name="adj" fmla="val 5000"/>
-            </a:avLst>
-          </a:prstGeom>
-          <a:solidFill>
-            <a:srgbClr val="FFFFFF"/>
-          </a:solidFill>
-          <a:ln w="9525">
-            <a:solidFill>
-              <a:srgbClr val="E2E8F3"/>
-            </a:solidFill>
-          </a:ln>
-          <a:effectLst>
-            <a:outerShdw blurRad="80000" dist="30000" dir="5400000" rotWithShape="0">
-              <a:srgbClr val="17244A">
-                <a:alpha val="70000"/>
-              </a:srgbClr>
-            </a:outerShdw>
-          </a:effectLst>
-        </p:spPr>
-        <p:style>
-          <a:lnRef idx="1">
-            <a:schemeClr val="accent1"/>
-          </a:lnRef>
-          <a:fillRef idx="3">
-            <a:schemeClr val="accent1"/>
-          </a:fillRef>
-          <a:effectRef idx="2">
-            <a:schemeClr val="accent1"/>
-          </a:effectRef>
-          <a:fontRef idx="minor">
-            <a:schemeClr val="lt1"/>
-          </a:fontRef>
-        </p:style>
-        <p:txBody>
-          <a:bodyPr rtlCol="0" anchor="ctr"/>
-          <a:lstStyle/>
-          <a:p>
-            <a:pPr algn="ctr"/>
-          </a:p>
-        </p:txBody>
-      </p:sp>
-      <p:sp>
-        <p:nvSpPr>
-          <p:cNvPr id="47" name="Rectangle 46"/>
-          <p:cNvSpPr/>
-          <p:nvPr/>
-        </p:nvSpPr>
-        <p:spPr>
-          <a:xfrm>
-            <a:off x="6867144" y="1097280"/>
-            <a:ext cx="1719072" cy="45720"/>
-          </a:xfrm>
-          <a:prstGeom prst="rect">
-            <a:avLst/>
-          </a:prstGeom>
-          <a:solidFill>
-            <a:srgbClr val="7D3CFF"/>
-          </a:solidFill>
-          <a:ln>
-            <a:noFill/>
-          </a:ln>
-          <a:effectLst/>
-        </p:spPr>
-        <p:style>
-          <a:lnRef idx="1">
-            <a:schemeClr val="accent1"/>
-          </a:lnRef>
-          <a:fillRef idx="3">
-            <a:schemeClr val="accent1"/>
-          </a:fillRef>
-          <a:effectRef idx="2">
-            <a:schemeClr val="accent1"/>
-          </a:effectRef>
-          <a:fontRef idx="minor">
-            <a:schemeClr val="lt1"/>
-          </a:fontRef>
-        </p:style>
-        <p:txBody>
-          <a:bodyPr rtlCol="0" anchor="ctr"/>
-          <a:lstStyle/>
-          <a:p>
-            <a:pPr algn="ctr"/>
-          </a:p>
-        </p:txBody>
-      </p:sp>
-      <p:sp>
-        <p:nvSpPr>
-          <p:cNvPr id="48" name="Oval 47"/>
-          <p:cNvSpPr/>
-          <p:nvPr/>
-        </p:nvSpPr>
-        <p:spPr>
-          <a:xfrm>
-            <a:off x="7470648" y="1225296"/>
-            <a:ext cx="512064" cy="512064"/>
-          </a:xfrm>
-          <a:prstGeom prst="ellipse">
-            <a:avLst/>
-          </a:prstGeom>
-          <a:gradFill>
-            <a:gsLst>
-              <a:gs pos="0">
-                <a:srgbClr val="7D3CFF"/>
-              </a:gs>
-              <a:gs pos="100000">
-                <a:srgbClr val="5A1BDF"/>
-              </a:gs>
-            </a:gsLst>
-            <a:lin ang="2700000" scaled="1"/>
-          </a:gradFill>
-          <a:ln>
-            <a:noFill/>
-          </a:ln>
-          <a:effectLst/>
-        </p:spPr>
-        <p:style>
-          <a:lnRef idx="1">
-            <a:schemeClr val="accent1"/>
-          </a:lnRef>
-          <a:fillRef idx="3">
-            <a:schemeClr val="accent1"/>
-          </a:fillRef>
-          <a:effectRef idx="2">
-            <a:schemeClr val="accent1"/>
-          </a:effectRef>
-          <a:fontRef idx="minor">
-            <a:schemeClr val="lt1"/>
-          </a:fontRef>
-        </p:style>
-        <p:txBody>
-          <a:bodyPr rtlCol="0" anchor="ctr"/>
-          <a:lstStyle/>
-          <a:p>
-            <a:pPr algn="ctr"/>
-          </a:p>
-        </p:txBody>
-      </p:sp>
-      <p:pic>
-        <p:nvPicPr>
-          <p:cNvPr id="49" name="Picture 48" descr="w-8-4.png"/>
-          <p:cNvPicPr>
-            <a:picLocks noChangeAspect="1"/>
-          </p:cNvPicPr>
-          <p:nvPr/>
-        </p:nvPicPr>
-        <p:blipFill>
-          <a:blip r:embed="rId5"/>
-          <a:stretch>
-            <a:fillRect/>
-          </a:stretch>
-        </p:blipFill>
-        <p:spPr>
-          <a:xfrm>
-            <a:off x="7593543" y="1348191"/>
-            <a:ext cx="266273" cy="266273"/>
-          </a:xfrm>
-          <a:prstGeom prst="rect">
-            <a:avLst/>
-          </a:prstGeom>
-        </p:spPr>
-      </p:pic>
-      <p:sp>
-        <p:nvSpPr>
-          <p:cNvPr id="50" name="TextBox 49"/>
-          <p:cNvSpPr txBox="1"/>
-          <p:nvPr/>
-        </p:nvSpPr>
-        <p:spPr>
-          <a:xfrm>
-            <a:off x="6848855" y="1874519"/>
-            <a:ext cx="1755648" cy="320040"/>
-          </a:xfrm>
-          <a:prstGeom prst="rect">
-            <a:avLst/>
-          </a:prstGeom>
-          <a:noFill/>
-        </p:spPr>
-        <p:txBody>
-          <a:bodyPr wrap="square" anchor="t" lIns="27432" rIns="27432" tIns="9144" bIns="9144">
-            <a:spAutoFit/>
-          </a:bodyPr>
-          <a:lstStyle/>
-          <a:p>
-            <a:pPr algn="ctr">
-              <a:lnSpc>
-                <a:spcPct val="100000"/>
-              </a:lnSpc>
-              <a:spcBef>
-                <a:spcPts val="0"/>
-              </a:spcBef>
-              <a:spcAft>
-                <a:spcPts val="200"/>
-              </a:spcAft>
-            </a:pPr>
-            <a:r>
-              <a:rPr sz="1150" b="1" i="0">
-                <a:solidFill>
-                  <a:srgbClr val="0A1A3D"/>
-                </a:solidFill>
-                <a:latin typeface="微软雅黑"/>
-                <a:ea typeface="微软雅黑"/>
-                <a:cs typeface="微软雅黑"/>
-              </a:rPr>
-              <a:t>展车模型制作</a:t>
-            </a:r>
-          </a:p>
-        </p:txBody>
-      </p:sp>
-      <p:sp>
-        <p:nvSpPr>
-          <p:cNvPr id="51" name="TextBox 50"/>
-          <p:cNvSpPr txBox="1"/>
-          <p:nvPr/>
-        </p:nvSpPr>
-        <p:spPr>
-          <a:xfrm>
-            <a:off x="6848855" y="2194560"/>
-            <a:ext cx="1755648" cy="274320"/>
-          </a:xfrm>
-          <a:prstGeom prst="rect">
-            <a:avLst/>
-          </a:prstGeom>
-          <a:noFill/>
-        </p:spPr>
-        <p:txBody>
-          <a:bodyPr wrap="square" anchor="t" lIns="27432" rIns="27432" tIns="9144" bIns="9144">
-            <a:spAutoFit/>
-          </a:bodyPr>
-          <a:lstStyle/>
-          <a:p>
-            <a:pPr algn="ctr">
-              <a:lnSpc>
-                <a:spcPct val="110000"/>
-              </a:lnSpc>
-              <a:spcBef>
-                <a:spcPts val="0"/>
-              </a:spcBef>
-              <a:spcAft>
-                <a:spcPts val="200"/>
-              </a:spcAft>
-            </a:pPr>
-            <a:r>
-              <a:rPr sz="750" b="0" i="0">
-                <a:solidFill>
-                  <a:srgbClr val="5B6782"/>
-                </a:solidFill>
-                <a:latin typeface="微软雅黑"/>
-                <a:ea typeface="微软雅黑"/>
-                <a:cs typeface="微软雅黑"/>
-              </a:rPr>
-              <a:t>原型车·工艺·交付</a:t>
-            </a:r>
-          </a:p>
-        </p:txBody>
-      </p:sp>
-      <p:sp>
-        <p:nvSpPr>
-          <p:cNvPr id="52" name="Rounded Rectangle 51"/>
-          <p:cNvSpPr/>
-          <p:nvPr/>
-        </p:nvSpPr>
-        <p:spPr>
-          <a:xfrm>
-            <a:off x="502920" y="2651760"/>
-            <a:ext cx="1938528" cy="1188720"/>
-          </a:xfrm>
-          <a:prstGeom prst="roundRect">
-            <a:avLst>
-              <a:gd name="adj" fmla="val 6000"/>
-            </a:avLst>
-          </a:prstGeom>
-          <a:solidFill>
-            <a:srgbClr val="F5F8FD"/>
-          </a:solidFill>
-          <a:ln w="9525">
-            <a:solidFill>
-              <a:srgbClr val="E2E8F3"/>
-            </a:solidFill>
-          </a:ln>
-          <a:effectLst>
-            <a:outerShdw blurRad="45000" dist="14000" dir="5400000" rotWithShape="0">
-              <a:srgbClr val="17244A">
-                <a:alpha val="85000"/>
-              </a:srgbClr>
-            </a:outerShdw>
-          </a:effectLst>
-        </p:spPr>
-        <p:style>
-          <a:lnRef idx="1">
-            <a:schemeClr val="accent1"/>
-          </a:lnRef>
-          <a:fillRef idx="3">
-            <a:schemeClr val="accent1"/>
-          </a:fillRef>
-          <a:effectRef idx="2">
-            <a:schemeClr val="accent1"/>
-          </a:effectRef>
-          <a:fontRef idx="minor">
-            <a:schemeClr val="lt1"/>
-          </a:fontRef>
-        </p:style>
-        <p:txBody>
-          <a:bodyPr rtlCol="0" anchor="ctr"/>
-          <a:lstStyle/>
-          <a:p>
-            <a:pPr algn="ctr"/>
-          </a:p>
-        </p:txBody>
-      </p:sp>
-      <p:sp>
-        <p:nvSpPr>
-          <p:cNvPr id="53" name="TextBox 52"/>
-          <p:cNvSpPr txBox="1"/>
-          <p:nvPr/>
-        </p:nvSpPr>
-        <p:spPr>
-          <a:xfrm>
-            <a:off x="594360" y="2834640"/>
-            <a:ext cx="1755648" cy="365760"/>
-          </a:xfrm>
-          <a:prstGeom prst="rect">
-            <a:avLst/>
-          </a:prstGeom>
-          <a:noFill/>
-        </p:spPr>
-        <p:txBody>
-          <a:bodyPr wrap="square" anchor="t" lIns="27432" rIns="27432" tIns="9144" bIns="9144">
-            <a:spAutoFit/>
-          </a:bodyPr>
-          <a:lstStyle/>
-          <a:p>
-            <a:pPr algn="ctr">
-              <a:lnSpc>
-                <a:spcPct val="100000"/>
-              </a:lnSpc>
-              <a:spcBef>
-                <a:spcPts val="0"/>
-              </a:spcBef>
-              <a:spcAft>
-                <a:spcPts val="200"/>
-              </a:spcAft>
-            </a:pPr>
-            <a:r>
-              <a:rPr sz="1100" b="1" i="0">
-                <a:solidFill>
-                  <a:srgbClr val="246BFF"/>
-                </a:solidFill>
-                <a:latin typeface="微软雅黑"/>
-                <a:ea typeface="微软雅黑"/>
-                <a:cs typeface="微软雅黑"/>
-              </a:rPr>
-              <a:t>协同合作</a:t>
-            </a:r>
-          </a:p>
-        </p:txBody>
-      </p:sp>
-      <p:sp>
-        <p:nvSpPr>
-          <p:cNvPr id="54" name="TextBox 53"/>
-          <p:cNvSpPr txBox="1"/>
-          <p:nvPr/>
-        </p:nvSpPr>
-        <p:spPr>
-          <a:xfrm>
-            <a:off x="594360" y="3218688"/>
-            <a:ext cx="1755648" cy="457200"/>
-          </a:xfrm>
-          <a:prstGeom prst="rect">
-            <a:avLst/>
-          </a:prstGeom>
-          <a:noFill/>
-        </p:spPr>
-        <p:txBody>
-          <a:bodyPr wrap="square" anchor="t" lIns="27432" rIns="27432" tIns="9144" bIns="9144">
-            <a:spAutoFit/>
-          </a:bodyPr>
-          <a:lstStyle/>
-          <a:p>
-            <a:pPr algn="ctr">
-              <a:lnSpc>
-                <a:spcPct val="110000"/>
-              </a:lnSpc>
-              <a:spcBef>
-                <a:spcPts val="0"/>
-              </a:spcBef>
-              <a:spcAft>
-                <a:spcPts val="200"/>
-              </a:spcAft>
-            </a:pPr>
-            <a:r>
-              <a:rPr sz="800" b="0" i="0">
-                <a:solidFill>
-                  <a:srgbClr val="5B6782"/>
-                </a:solidFill>
-                <a:latin typeface="微软雅黑"/>
-                <a:ea typeface="微软雅黑"/>
-                <a:cs typeface="微软雅黑"/>
-              </a:rPr>
-              <a:t>各团队无缝对接</a:t>
-            </a:r>
-          </a:p>
-        </p:txBody>
-      </p:sp>
-      <p:sp>
-        <p:nvSpPr>
-          <p:cNvPr id="55" name="Rounded Rectangle 54"/>
-          <p:cNvSpPr/>
-          <p:nvPr/>
-        </p:nvSpPr>
-        <p:spPr>
-          <a:xfrm>
-            <a:off x="2587752" y="2651760"/>
-            <a:ext cx="1938528" cy="1188720"/>
-          </a:xfrm>
-          <a:prstGeom prst="roundRect">
-            <a:avLst>
-              <a:gd name="adj" fmla="val 6000"/>
-            </a:avLst>
-          </a:prstGeom>
-          <a:solidFill>
-            <a:srgbClr val="F5F8FD"/>
-          </a:solidFill>
-          <a:ln w="9525">
-            <a:solidFill>
-              <a:srgbClr val="E2E8F3"/>
-            </a:solidFill>
-          </a:ln>
-          <a:effectLst>
-            <a:outerShdw blurRad="45000" dist="14000" dir="5400000" rotWithShape="0">
-              <a:srgbClr val="17244A">
-                <a:alpha val="85000"/>
-              </a:srgbClr>
-            </a:outerShdw>
-          </a:effectLst>
-        </p:spPr>
-        <p:style>
-          <a:lnRef idx="1">
-            <a:schemeClr val="accent1"/>
-          </a:lnRef>
-          <a:fillRef idx="3">
-            <a:schemeClr val="accent1"/>
-          </a:fillRef>
-          <a:effectRef idx="2">
-            <a:schemeClr val="accent1"/>
-          </a:effectRef>
-          <a:fontRef idx="minor">
-            <a:schemeClr val="lt1"/>
-          </a:fontRef>
-        </p:style>
-        <p:txBody>
-          <a:bodyPr rtlCol="0" anchor="ctr"/>
-          <a:lstStyle/>
-          <a:p>
-            <a:pPr algn="ctr"/>
-          </a:p>
-        </p:txBody>
-      </p:sp>
-      <p:sp>
-        <p:nvSpPr>
-          <p:cNvPr id="56" name="TextBox 55"/>
-          <p:cNvSpPr txBox="1"/>
-          <p:nvPr/>
-        </p:nvSpPr>
-        <p:spPr>
-          <a:xfrm>
-            <a:off x="2679192" y="2834640"/>
-            <a:ext cx="1755648" cy="365760"/>
-          </a:xfrm>
-          <a:prstGeom prst="rect">
-            <a:avLst/>
-          </a:prstGeom>
-          <a:noFill/>
-        </p:spPr>
-        <p:txBody>
-          <a:bodyPr wrap="square" anchor="t" lIns="27432" rIns="27432" tIns="9144" bIns="9144">
-            <a:spAutoFit/>
-          </a:bodyPr>
-          <a:lstStyle/>
-          <a:p>
-            <a:pPr algn="ctr">
-              <a:lnSpc>
-                <a:spcPct val="100000"/>
-              </a:lnSpc>
-              <a:spcBef>
-                <a:spcPts val="0"/>
-              </a:spcBef>
-              <a:spcAft>
-                <a:spcPts val="200"/>
-              </a:spcAft>
-            </a:pPr>
-            <a:r>
-              <a:rPr sz="1100" b="1" i="0">
-                <a:solidFill>
-                  <a:srgbClr val="246BFF"/>
-                </a:solidFill>
-                <a:latin typeface="微软雅黑"/>
-                <a:ea typeface="微软雅黑"/>
-                <a:cs typeface="微软雅黑"/>
-              </a:rPr>
-              <a:t>效率提升</a:t>
-            </a:r>
-          </a:p>
-        </p:txBody>
-      </p:sp>
-      <p:sp>
-        <p:nvSpPr>
-          <p:cNvPr id="57" name="TextBox 56"/>
-          <p:cNvSpPr txBox="1"/>
-          <p:nvPr/>
-        </p:nvSpPr>
-        <p:spPr>
-          <a:xfrm>
-            <a:off x="2679192" y="3218688"/>
-            <a:ext cx="1755648" cy="457200"/>
-          </a:xfrm>
-          <a:prstGeom prst="rect">
-            <a:avLst/>
-          </a:prstGeom>
-          <a:noFill/>
-        </p:spPr>
-        <p:txBody>
-          <a:bodyPr wrap="square" anchor="t" lIns="27432" rIns="27432" tIns="9144" bIns="9144">
-            <a:spAutoFit/>
-          </a:bodyPr>
-          <a:lstStyle/>
-          <a:p>
-            <a:pPr algn="ctr">
-              <a:lnSpc>
-                <a:spcPct val="110000"/>
-              </a:lnSpc>
-              <a:spcBef>
-                <a:spcPts val="0"/>
-              </a:spcBef>
-              <a:spcAft>
-                <a:spcPts val="200"/>
-              </a:spcAft>
-            </a:pPr>
-            <a:r>
-              <a:rPr sz="800" b="0" i="0">
-                <a:solidFill>
-                  <a:srgbClr val="5B6782"/>
-                </a:solidFill>
-                <a:latin typeface="微软雅黑"/>
-                <a:ea typeface="微软雅黑"/>
-                <a:cs typeface="微软雅黑"/>
-              </a:rPr>
-              <a:t>减少沟通壁垒</a:t>
-            </a:r>
-          </a:p>
-        </p:txBody>
-      </p:sp>
-      <p:sp>
-        <p:nvSpPr>
-          <p:cNvPr id="58" name="Rounded Rectangle 57"/>
-          <p:cNvSpPr/>
-          <p:nvPr/>
-        </p:nvSpPr>
-        <p:spPr>
-          <a:xfrm>
-            <a:off x="4672584" y="2651760"/>
-            <a:ext cx="1938528" cy="1188720"/>
-          </a:xfrm>
-          <a:prstGeom prst="roundRect">
-            <a:avLst>
-              <a:gd name="adj" fmla="val 6000"/>
-            </a:avLst>
-          </a:prstGeom>
-          <a:solidFill>
-            <a:srgbClr val="F5F8FD"/>
-          </a:solidFill>
-          <a:ln w="9525">
-            <a:solidFill>
-              <a:srgbClr val="E2E8F3"/>
-            </a:solidFill>
-          </a:ln>
-          <a:effectLst>
-            <a:outerShdw blurRad="45000" dist="14000" dir="5400000" rotWithShape="0">
-              <a:srgbClr val="17244A">
-                <a:alpha val="85000"/>
-              </a:srgbClr>
-            </a:outerShdw>
-          </a:effectLst>
-        </p:spPr>
-        <p:style>
-          <a:lnRef idx="1">
-            <a:schemeClr val="accent1"/>
-          </a:lnRef>
-          <a:fillRef idx="3">
-            <a:schemeClr val="accent1"/>
-          </a:fillRef>
-          <a:effectRef idx="2">
-            <a:schemeClr val="accent1"/>
-          </a:effectRef>
-          <a:fontRef idx="minor">
-            <a:schemeClr val="lt1"/>
-          </a:fontRef>
-        </p:style>
-        <p:txBody>
-          <a:bodyPr rtlCol="0" anchor="ctr"/>
-          <a:lstStyle/>
-          <a:p>
-            <a:pPr algn="ctr"/>
-          </a:p>
-        </p:txBody>
-      </p:sp>
-      <p:sp>
-        <p:nvSpPr>
-          <p:cNvPr id="59" name="TextBox 58"/>
-          <p:cNvSpPr txBox="1"/>
-          <p:nvPr/>
-        </p:nvSpPr>
-        <p:spPr>
-          <a:xfrm>
-            <a:off x="4764024" y="2834640"/>
-            <a:ext cx="1755648" cy="365760"/>
-          </a:xfrm>
-          <a:prstGeom prst="rect">
-            <a:avLst/>
-          </a:prstGeom>
-          <a:noFill/>
-        </p:spPr>
-        <p:txBody>
-          <a:bodyPr wrap="square" anchor="t" lIns="27432" rIns="27432" tIns="9144" bIns="9144">
-            <a:spAutoFit/>
-          </a:bodyPr>
-          <a:lstStyle/>
-          <a:p>
-            <a:pPr algn="ctr">
-              <a:lnSpc>
-                <a:spcPct val="100000"/>
-              </a:lnSpc>
-              <a:spcBef>
-                <a:spcPts val="0"/>
-              </a:spcBef>
-              <a:spcAft>
-                <a:spcPts val="200"/>
-              </a:spcAft>
-            </a:pPr>
-            <a:r>
-              <a:rPr sz="1100" b="1" i="0">
-                <a:solidFill>
-                  <a:srgbClr val="246BFF"/>
-                </a:solidFill>
-                <a:latin typeface="微软雅黑"/>
-                <a:ea typeface="微软雅黑"/>
-                <a:cs typeface="微软雅黑"/>
-              </a:rPr>
-              <a:t>同步工作</a:t>
-            </a:r>
-          </a:p>
-        </p:txBody>
-      </p:sp>
-      <p:sp>
-        <p:nvSpPr>
-          <p:cNvPr id="60" name="TextBox 59"/>
-          <p:cNvSpPr txBox="1"/>
-          <p:nvPr/>
-        </p:nvSpPr>
-        <p:spPr>
-          <a:xfrm>
-            <a:off x="4764024" y="3218688"/>
-            <a:ext cx="1755648" cy="457200"/>
-          </a:xfrm>
-          <a:prstGeom prst="rect">
-            <a:avLst/>
-          </a:prstGeom>
-          <a:noFill/>
-        </p:spPr>
-        <p:txBody>
-          <a:bodyPr wrap="square" anchor="t" lIns="27432" rIns="27432" tIns="9144" bIns="9144">
-            <a:spAutoFit/>
-          </a:bodyPr>
-          <a:lstStyle/>
-          <a:p>
-            <a:pPr algn="ctr">
-              <a:lnSpc>
-                <a:spcPct val="110000"/>
-              </a:lnSpc>
-              <a:spcBef>
-                <a:spcPts val="0"/>
-              </a:spcBef>
-              <a:spcAft>
-                <a:spcPts val="200"/>
-              </a:spcAft>
-            </a:pPr>
-            <a:r>
-              <a:rPr sz="800" b="0" i="0">
-                <a:solidFill>
-                  <a:srgbClr val="5B6782"/>
-                </a:solidFill>
-                <a:latin typeface="微软雅黑"/>
-                <a:ea typeface="微软雅黑"/>
-                <a:cs typeface="微软雅黑"/>
-              </a:rPr>
-              <a:t>并行模式推进</a:t>
-            </a:r>
-          </a:p>
-        </p:txBody>
-      </p:sp>
-      <p:sp>
-        <p:nvSpPr>
-          <p:cNvPr id="61" name="Rounded Rectangle 60"/>
-          <p:cNvSpPr/>
-          <p:nvPr/>
-        </p:nvSpPr>
-        <p:spPr>
-          <a:xfrm>
-            <a:off x="6757416" y="2651760"/>
-            <a:ext cx="1938528" cy="1188720"/>
-          </a:xfrm>
-          <a:prstGeom prst="roundRect">
-            <a:avLst>
-              <a:gd name="adj" fmla="val 6000"/>
-            </a:avLst>
-          </a:prstGeom>
-          <a:solidFill>
-            <a:srgbClr val="F5F8FD"/>
-          </a:solidFill>
-          <a:ln w="9525">
-            <a:solidFill>
-              <a:srgbClr val="E2E8F3"/>
-            </a:solidFill>
-          </a:ln>
-          <a:effectLst>
-            <a:outerShdw blurRad="45000" dist="14000" dir="5400000" rotWithShape="0">
-              <a:srgbClr val="17244A">
-                <a:alpha val="85000"/>
-              </a:srgbClr>
-            </a:outerShdw>
-          </a:effectLst>
-        </p:spPr>
-        <p:style>
-          <a:lnRef idx="1">
-            <a:schemeClr val="accent1"/>
-          </a:lnRef>
-          <a:fillRef idx="3">
-            <a:schemeClr val="accent1"/>
-          </a:fillRef>
-          <a:effectRef idx="2">
-            <a:schemeClr val="accent1"/>
-          </a:effectRef>
-          <a:fontRef idx="minor">
-            <a:schemeClr val="lt1"/>
-          </a:fontRef>
-        </p:style>
-        <p:txBody>
-          <a:bodyPr rtlCol="0" anchor="ctr"/>
-          <a:lstStyle/>
-          <a:p>
-            <a:pPr algn="ctr"/>
-          </a:p>
-        </p:txBody>
-      </p:sp>
-      <p:sp>
-        <p:nvSpPr>
-          <p:cNvPr id="62" name="TextBox 61"/>
-          <p:cNvSpPr txBox="1"/>
-          <p:nvPr/>
-        </p:nvSpPr>
-        <p:spPr>
-          <a:xfrm>
-            <a:off x="6848855" y="2834640"/>
-            <a:ext cx="1755648" cy="365760"/>
-          </a:xfrm>
-          <a:prstGeom prst="rect">
-            <a:avLst/>
-          </a:prstGeom>
-          <a:noFill/>
-        </p:spPr>
-        <p:txBody>
-          <a:bodyPr wrap="square" anchor="t" lIns="27432" rIns="27432" tIns="9144" bIns="9144">
-            <a:spAutoFit/>
-          </a:bodyPr>
-          <a:lstStyle/>
-          <a:p>
-            <a:pPr algn="ctr">
-              <a:lnSpc>
-                <a:spcPct val="100000"/>
-              </a:lnSpc>
-              <a:spcBef>
-                <a:spcPts val="0"/>
-              </a:spcBef>
-              <a:spcAft>
-                <a:spcPts val="200"/>
-              </a:spcAft>
-            </a:pPr>
-            <a:r>
-              <a:rPr sz="1100" b="1" i="0">
-                <a:solidFill>
-                  <a:srgbClr val="7D3CFF"/>
-                </a:solidFill>
-                <a:latin typeface="微软雅黑"/>
-                <a:ea typeface="微软雅黑"/>
-                <a:cs typeface="微软雅黑"/>
-              </a:rPr>
-              <a:t>责任归属</a:t>
-            </a:r>
-          </a:p>
-        </p:txBody>
-      </p:sp>
-      <p:sp>
-        <p:nvSpPr>
-          <p:cNvPr id="63" name="TextBox 62"/>
-          <p:cNvSpPr txBox="1"/>
-          <p:nvPr/>
-        </p:nvSpPr>
-        <p:spPr>
-          <a:xfrm>
-            <a:off x="6848855" y="3218688"/>
-            <a:ext cx="1755648" cy="457200"/>
-          </a:xfrm>
-          <a:prstGeom prst="rect">
-            <a:avLst/>
-          </a:prstGeom>
-          <a:noFill/>
-        </p:spPr>
-        <p:txBody>
-          <a:bodyPr wrap="square" anchor="t" lIns="27432" rIns="27432" tIns="9144" bIns="9144">
-            <a:spAutoFit/>
-          </a:bodyPr>
-          <a:lstStyle/>
-          <a:p>
-            <a:pPr algn="ctr">
-              <a:lnSpc>
-                <a:spcPct val="110000"/>
-              </a:lnSpc>
-              <a:spcBef>
-                <a:spcPts val="0"/>
-              </a:spcBef>
-              <a:spcAft>
-                <a:spcPts val="200"/>
-              </a:spcAft>
-            </a:pPr>
-            <a:r>
-              <a:rPr sz="800" b="0" i="0">
-                <a:solidFill>
-                  <a:srgbClr val="5B6782"/>
-                </a:solidFill>
-                <a:latin typeface="微软雅黑"/>
-                <a:ea typeface="微软雅黑"/>
-                <a:cs typeface="微软雅黑"/>
-              </a:rPr>
-              <a:t>清晰界定·根源解决</a:t>
-            </a:r>
-          </a:p>
-        </p:txBody>
-      </p:sp>
-      <p:sp>
-        <p:nvSpPr>
-          <p:cNvPr id="64" name="Rounded Rectangle 63"/>
-          <p:cNvSpPr/>
-          <p:nvPr/>
-        </p:nvSpPr>
-        <p:spPr>
-          <a:xfrm>
-            <a:off x="502920" y="3986784"/>
-            <a:ext cx="8138160" cy="585216"/>
-          </a:xfrm>
-          <a:prstGeom prst="roundRect">
-            <a:avLst>
-              <a:gd name="adj" fmla="val 12000"/>
-            </a:avLst>
-          </a:prstGeom>
-          <a:gradFill>
-            <a:gsLst>
-              <a:gs pos="0">
-                <a:srgbClr val="0A1A3D"/>
-              </a:gs>
-              <a:gs pos="100000">
-                <a:srgbClr val="291C5E"/>
-              </a:gs>
-            </a:gsLst>
-            <a:lin ang="0" scaled="1"/>
-          </a:gradFill>
-          <a:ln>
-            <a:noFill/>
-          </a:ln>
-          <a:effectLst>
-            <a:outerShdw blurRad="80000" dist="30000" dir="5400000" rotWithShape="0">
-              <a:srgbClr val="17244A">
-                <a:alpha val="78000"/>
-              </a:srgbClr>
-            </a:outerShdw>
-          </a:effectLst>
-        </p:spPr>
-        <p:style>
-          <a:lnRef idx="1">
-            <a:schemeClr val="accent1"/>
-          </a:lnRef>
-          <a:fillRef idx="3">
-            <a:schemeClr val="accent1"/>
-          </a:fillRef>
-          <a:effectRef idx="2">
-            <a:schemeClr val="accent1"/>
-          </a:effectRef>
-          <a:fontRef idx="minor">
-            <a:schemeClr val="lt1"/>
-          </a:fontRef>
-        </p:style>
-        <p:txBody>
-          <a:bodyPr rtlCol="0" anchor="ctr"/>
-          <a:lstStyle/>
-          <a:p>
-            <a:pPr algn="ctr"/>
-          </a:p>
-        </p:txBody>
-      </p:sp>
-      <p:sp>
-        <p:nvSpPr>
-          <p:cNvPr id="65" name="Rectangle 64"/>
-          <p:cNvSpPr/>
-          <p:nvPr/>
-        </p:nvSpPr>
-        <p:spPr>
-          <a:xfrm>
-            <a:off x="502920" y="4114800"/>
-            <a:ext cx="54864" cy="329184"/>
-          </a:xfrm>
-          <a:prstGeom prst="rect">
-            <a:avLst/>
-          </a:prstGeom>
-          <a:solidFill>
-            <a:srgbClr val="00B5E3"/>
-          </a:solidFill>
-          <a:ln>
-            <a:noFill/>
-          </a:ln>
-          <a:effectLst/>
-        </p:spPr>
-        <p:style>
-          <a:lnRef idx="1">
-            <a:schemeClr val="accent1"/>
-          </a:lnRef>
-          <a:fillRef idx="3">
-            <a:schemeClr val="accent1"/>
-          </a:fillRef>
-          <a:effectRef idx="2">
-            <a:schemeClr val="accent1"/>
-          </a:effectRef>
-          <a:fontRef idx="minor">
-            <a:schemeClr val="lt1"/>
-          </a:fontRef>
-        </p:style>
-        <p:txBody>
-          <a:bodyPr rtlCol="0" anchor="ctr"/>
-          <a:lstStyle/>
-          <a:p>
-            <a:pPr algn="ctr"/>
-          </a:p>
-        </p:txBody>
-      </p:sp>
-      <p:sp>
-        <p:nvSpPr>
-          <p:cNvPr id="66" name="TextBox 65"/>
-          <p:cNvSpPr txBox="1"/>
-          <p:nvPr/>
-        </p:nvSpPr>
-        <p:spPr>
-          <a:xfrm>
-            <a:off x="795528" y="3986784"/>
-            <a:ext cx="7589520" cy="585216"/>
-          </a:xfrm>
-          <a:prstGeom prst="rect">
-            <a:avLst/>
-          </a:prstGeom>
-          <a:noFill/>
-        </p:spPr>
-        <p:txBody>
-          <a:bodyPr wrap="square" anchor="ctr" lIns="27432" rIns="27432" tIns="9144" bIns="9144">
-            <a:spAutoFit/>
-          </a:bodyPr>
-          <a:lstStyle/>
-          <a:p>
-            <a:pPr algn="l">
-              <a:lnSpc>
-                <a:spcPct val="110000"/>
-              </a:lnSpc>
-              <a:spcBef>
-                <a:spcPts val="0"/>
-              </a:spcBef>
-              <a:spcAft>
-                <a:spcPts val="200"/>
-              </a:spcAft>
-            </a:pPr>
-            <a:r>
-              <a:rPr sz="1250" b="1" i="0">
-                <a:solidFill>
-                  <a:srgbClr val="FFFFFF"/>
-                </a:solidFill>
-                <a:latin typeface="微软雅黑"/>
-                <a:ea typeface="微软雅黑"/>
-                <a:cs typeface="微软雅黑"/>
-              </a:rPr>
-              <a:t>智能座舱 · 一站式 · 解决方案</a:t>
-            </a:r>
-            <a:r>
-              <a:rPr sz="1100" b="0" i="0">
-                <a:solidFill>
-                  <a:srgbClr val="D0D5E2"/>
-                </a:solidFill>
-                <a:latin typeface="微软雅黑"/>
-                <a:ea typeface="微软雅黑"/>
-                <a:cs typeface="微软雅黑"/>
-              </a:rPr>
-              <a:t>  你只对接一个责任主体,协同出的问题由我们兜底。</a:t>
-            </a:r>
-          </a:p>
-        </p:txBody>
-      </p:sp>
-      <p:sp>
-        <p:nvSpPr>
-          <p:cNvPr id="67" name="Rectangle 66"/>
-          <p:cNvSpPr/>
-          <p:nvPr/>
-        </p:nvSpPr>
-        <p:spPr>
-          <a:xfrm>
-            <a:off x="502920" y="4846320"/>
-            <a:ext cx="8138160" cy="10972"/>
-          </a:xfrm>
-          <a:prstGeom prst="rect">
-            <a:avLst/>
-          </a:prstGeom>
-          <a:solidFill>
-            <a:srgbClr val="E2E8F3"/>
-          </a:solidFill>
-          <a:ln>
-            <a:noFill/>
-          </a:ln>
-          <a:effectLst/>
-        </p:spPr>
-        <p:style>
-          <a:lnRef idx="1">
-            <a:schemeClr val="accent1"/>
-          </a:lnRef>
-          <a:fillRef idx="3">
-            <a:schemeClr val="accent1"/>
-          </a:fillRef>
-          <a:effectRef idx="2">
-            <a:schemeClr val="accent1"/>
-          </a:effectRef>
-          <a:fontRef idx="minor">
-            <a:schemeClr val="lt1"/>
-          </a:fontRef>
-        </p:style>
-        <p:txBody>
-          <a:bodyPr rtlCol="0" anchor="ctr"/>
-          <a:lstStyle/>
-          <a:p>
-            <a:pPr algn="ctr"/>
-          </a:p>
-        </p:txBody>
-      </p:sp>
-      <p:sp>
-        <p:nvSpPr>
-          <p:cNvPr id="68" name="TextBox 67"/>
-          <p:cNvSpPr txBox="1"/>
-          <p:nvPr/>
-        </p:nvSpPr>
-        <p:spPr>
-          <a:xfrm>
-            <a:off x="822960" y="4873752"/>
-            <a:ext cx="6400800" cy="219456"/>
-          </a:xfrm>
-          <a:prstGeom prst="rect">
-            <a:avLst/>
-          </a:prstGeom>
-          <a:noFill/>
-        </p:spPr>
-        <p:txBody>
-          <a:bodyPr wrap="square" anchor="t" lIns="27432" rIns="27432" tIns="9144" bIns="9144">
-            <a:spAutoFit/>
-          </a:bodyPr>
-          <a:lstStyle/>
-          <a:p>
-            <a:pPr algn="l">
-              <a:lnSpc>
-                <a:spcPct val="100000"/>
-              </a:lnSpc>
-              <a:spcBef>
-                <a:spcPts val="0"/>
-              </a:spcBef>
-              <a:spcAft>
-                <a:spcPts val="200"/>
-              </a:spcAft>
-            </a:pPr>
-            <a:r>
-              <a:rPr sz="800" b="1" i="0">
-                <a:solidFill>
-                  <a:srgbClr val="6A7896"/>
-                </a:solidFill>
-                <a:latin typeface="微软雅黑"/>
-                <a:ea typeface="微软雅黑"/>
-                <a:cs typeface="微软雅黑"/>
-              </a:rPr>
-              <a:t>卓迈 JOMEC</a:t>
-            </a:r>
-            <a:r>
-              <a:rPr sz="800" b="0" i="0">
-                <a:solidFill>
-                  <a:srgbClr val="959FB5"/>
-                </a:solidFill>
-                <a:latin typeface="微软雅黑"/>
-                <a:ea typeface="微软雅黑"/>
-                <a:cs typeface="微软雅黑"/>
-              </a:rPr>
-              <a:t>  ·  NICE 智能座舱体验舱 · 把硬件优势变成体验话语权</a:t>
-            </a:r>
-          </a:p>
-        </p:txBody>
-      </p:sp>
-      <p:sp>
-        <p:nvSpPr>
-          <p:cNvPr id="69" name="TextBox 68"/>
-          <p:cNvSpPr txBox="1"/>
-          <p:nvPr/>
-        </p:nvSpPr>
-        <p:spPr>
-          <a:xfrm>
-            <a:off x="7955279" y="4873752"/>
-            <a:ext cx="685800" cy="219456"/>
+            <a:off x="7818120" y="4855464"/>
+            <a:ext cx="777240" cy="219456"/>
           </a:xfrm>
           <a:prstGeom prst="rect">
             <a:avLst/>
@@ -7260,7 +4239,7 @@
             <a:r>
               <a:rPr sz="800" b="1" i="0">
                 <a:solidFill>
-                  <a:srgbClr val="6A7896"/>
+                  <a:srgbClr val="8A98B6"/>
                 </a:solidFill>
                 <a:latin typeface="Arial"/>
                 <a:ea typeface="Arial"/>
